--- a/docs/codex-copilot-multiagent.pptx
+++ b/docs/codex-copilot-multiagent.pptx
@@ -4,6 +4,9 @@
   <p:sldMasterIdLst>
     <p:sldMasterId id="2147483648" r:id="rId1"/>
   </p:sldMasterIdLst>
+  <p:notesMasterIdLst>
+    <p:notesMasterId r:id="rId17"/>
+  </p:notesMasterIdLst>
   <p:sldIdLst>
     <p:sldId id="256" r:id="rId2"/>
     <p:sldId id="257" r:id="rId3"/>
@@ -21,9 +24,6 @@
     <p:sldId id="269" r:id="rId15"/>
     <p:sldId id="270" r:id="rId16"/>
   </p:sldIdLst>
-  <p:notesMasterIdLst>
-    <p:notesMasterId r:id="rId17"/>
-  </p:notesMasterIdLst>
   <p:sldSz cx="12192000" cy="6858000"/>
   <p:notesSz cx="6858000" cy="12192000"/>
   <p:defaultTextStyle>
@@ -118,6 +118,11 @@
       </a:defRPr>
     </a:lvl9pPr>
   </p:defaultTextStyle>
+  <p:extLst>
+    <p:ext uri="{EFAFB233-063F-42B5-8137-9DF3F51BA10A}">
+      <p15:sldGuideLst xmlns:p15="http://schemas.microsoft.com/office/powerpoint/2012/main"/>
+    </p:ext>
+  </p:extLst>
 </p:presentation>
 </file>
 
@@ -143,234 +148,10 @@
           <a:chExt cx="0" cy="0"/>
         </a:xfrm>
       </p:grpSpPr>
-      <p:sp>
-        <p:nvSpPr>
-          <p:cNvPr id="2" name="Header Placeholder 1"/>
-          <p:cNvSpPr>
-            <a:spLocks noGrp="1"/>
-          </p:cNvSpPr>
-          <p:nvPr>
-            <p:ph type="hdr" sz="quarter"/>
-          </p:nvPr>
-        </p:nvSpPr>
-        <p:spPr>
-          <a:xfrm>
-            <a:off x="0" y="0"/>
-            <a:ext cx="2971800" cy="458788"/>
-          </a:xfrm>
-          <a:prstGeom prst="rect">
-            <a:avLst/>
-          </a:prstGeom>
-        </p:spPr>
-        <p:txBody>
-          <a:bodyPr vert="horz" lIns="91440" tIns="45720" rIns="91440" bIns="45720" rtlCol="0"/>
-          <a:lstStyle>
-            <a:lvl1pPr algn="l">
-              <a:defRPr sz="1200"/>
-            </a:lvl1pPr>
-          </a:lstStyle>
-          <a:p>
-            <a:endParaRPr lang="en-US"/>
-          </a:p>
-        </p:txBody>
-      </p:sp>
-      <p:sp>
-        <p:nvSpPr>
-          <p:cNvPr id="3" name="Date Placeholder 2"/>
-          <p:cNvSpPr>
-            <a:spLocks noGrp="1"/>
-          </p:cNvSpPr>
-          <p:nvPr>
-            <p:ph type="dt" idx="1"/>
-          </p:nvPr>
-        </p:nvSpPr>
-        <p:spPr>
-          <a:xfrm>
-            <a:off x="3884613" y="0"/>
-            <a:ext cx="2971800" cy="458788"/>
-          </a:xfrm>
-          <a:prstGeom prst="rect">
-            <a:avLst/>
-          </a:prstGeom>
-        </p:spPr>
-        <p:txBody>
-          <a:bodyPr vert="horz" lIns="91440" tIns="45720" rIns="91440" bIns="45720" rtlCol="0"/>
-          <a:lstStyle>
-            <a:lvl1pPr algn="r">
-              <a:defRPr sz="1200"/>
-            </a:lvl1pPr>
-          </a:lstStyle>
-          <a:p>
-            <a:fld id="{5282F153-3F37-0F45-9E97-73ACFA13230C}" type="datetimeFigureOut">
-              <a:rPr lang="en-US"/>
-              <a:t>7/23/19</a:t>
-            </a:fld>
-            <a:endParaRPr lang="en-US"/>
-          </a:p>
-        </p:txBody>
-      </p:sp>
-      <p:sp>
-        <p:nvSpPr>
-          <p:cNvPr id="4" name="Slide Image Placeholder 3"/>
-          <p:cNvSpPr>
-            <a:spLocks noGrp="1" noRot="1" noChangeAspect="1"/>
-          </p:cNvSpPr>
-          <p:nvPr>
-            <p:ph type="sldImg" idx="2"/>
-          </p:nvPr>
-        </p:nvSpPr>
-        <p:spPr>
-          <a:xfrm>
-            <a:off x="685800" y="1143000"/>
-            <a:ext cx="5486400" cy="3086100"/>
-          </a:xfrm>
-          <a:prstGeom prst="rect">
-            <a:avLst/>
-          </a:prstGeom>
-          <a:noFill/>
-          <a:ln w="12700">
-            <a:solidFill>
-              <a:prstClr val="black"/>
-            </a:solidFill>
-          </a:ln>
-        </p:spPr>
-        <p:txBody>
-          <a:bodyPr vert="horz" lIns="91440" tIns="45720" rIns="91440" bIns="45720" rtlCol="0" anchor="ctr"/>
-          <a:lstStyle/>
-          <a:p>
-            <a:endParaRPr lang="en-US"/>
-          </a:p>
-        </p:txBody>
-      </p:sp>
-      <p:sp>
-        <p:nvSpPr>
-          <p:cNvPr id="5" name="Notes Placeholder 4"/>
-          <p:cNvSpPr>
-            <a:spLocks noGrp="1"/>
-          </p:cNvSpPr>
-          <p:nvPr>
-            <p:ph type="body" sz="quarter" idx="3"/>
-          </p:nvPr>
-        </p:nvSpPr>
-        <p:spPr>
-          <a:xfrm>
-            <a:off x="685800" y="4400550"/>
-            <a:ext cx="5486400" cy="3600450"/>
-          </a:xfrm>
-          <a:prstGeom prst="rect">
-            <a:avLst/>
-          </a:prstGeom>
-        </p:spPr>
-        <p:txBody>
-          <a:bodyPr vert="horz" lIns="91440" tIns="45720" rIns="91440" bIns="45720" rtlCol="0"/>
-          <a:lstStyle/>
-          <a:p>
-            <a:pPr lvl="0"/>
-            <a:r>
-              <a:rPr lang="en-US"/>
-              <a:t>Click to edit Master text styles</a:t>
-            </a:r>
-          </a:p>
-          <a:p>
-            <a:pPr lvl="1"/>
-            <a:r>
-              <a:rPr lang="en-US"/>
-              <a:t>Second level</a:t>
-            </a:r>
-          </a:p>
-          <a:p>
-            <a:pPr lvl="2"/>
-            <a:r>
-              <a:rPr lang="en-US"/>
-              <a:t>Third level</a:t>
-            </a:r>
-          </a:p>
-          <a:p>
-            <a:pPr lvl="3"/>
-            <a:r>
-              <a:rPr lang="en-US"/>
-              <a:t>Fourth level</a:t>
-            </a:r>
-          </a:p>
-          <a:p>
-            <a:pPr lvl="4"/>
-            <a:r>
-              <a:rPr lang="en-US"/>
-              <a:t>Fifth level</a:t>
-            </a:r>
-          </a:p>
-        </p:txBody>
-      </p:sp>
-      <p:sp>
-        <p:nvSpPr>
-          <p:cNvPr id="6" name="Footer Placeholder 5"/>
-          <p:cNvSpPr>
-            <a:spLocks noGrp="1"/>
-          </p:cNvSpPr>
-          <p:nvPr>
-            <p:ph type="ftr" sz="quarter" idx="4"/>
-          </p:nvPr>
-        </p:nvSpPr>
-        <p:spPr>
-          <a:xfrm>
-            <a:off x="0" y="8685213"/>
-            <a:ext cx="2971800" cy="458787"/>
-          </a:xfrm>
-          <a:prstGeom prst="rect">
-            <a:avLst/>
-          </a:prstGeom>
-        </p:spPr>
-        <p:txBody>
-          <a:bodyPr vert="horz" lIns="91440" tIns="45720" rIns="91440" bIns="45720" rtlCol="0" anchor="b"/>
-          <a:lstStyle>
-            <a:lvl1pPr algn="l">
-              <a:defRPr sz="1200"/>
-            </a:lvl1pPr>
-          </a:lstStyle>
-          <a:p>
-            <a:endParaRPr lang="en-US"/>
-          </a:p>
-        </p:txBody>
-      </p:sp>
-      <p:sp>
-        <p:nvSpPr>
-          <p:cNvPr id="7" name="Slide Number Placeholder 6"/>
-          <p:cNvSpPr>
-            <a:spLocks noGrp="1"/>
-          </p:cNvSpPr>
-          <p:nvPr>
-            <p:ph type="sldNum" sz="quarter" idx="5"/>
-          </p:nvPr>
-        </p:nvSpPr>
-        <p:spPr>
-          <a:xfrm>
-            <a:off x="3884613" y="8685213"/>
-            <a:ext cx="2971800" cy="458787"/>
-          </a:xfrm>
-          <a:prstGeom prst="rect">
-            <a:avLst/>
-          </a:prstGeom>
-        </p:spPr>
-        <p:txBody>
-          <a:bodyPr vert="horz" lIns="91440" tIns="45720" rIns="91440" bIns="45720" rtlCol="0" anchor="b"/>
-          <a:lstStyle>
-            <a:lvl1pPr algn="r">
-              <a:defRPr sz="1200"/>
-            </a:lvl1pPr>
-          </a:lstStyle>
-          <a:p>
-            <a:fld id="{CE5E9CC1-C706-0F49-92D6-E571CC5EEA8F}" type="slidenum">
-              <a:rPr lang="en-US"/>
-              <a:t>‹#›</a:t>
-            </a:fld>
-            <a:endParaRPr lang="en-US"/>
-          </a:p>
-        </p:txBody>
-      </p:sp>
     </p:spTree>
     <p:extLst>
       <p:ext uri="{BB962C8B-B14F-4D97-AF65-F5344CB8AC3E}">
-        <p14:creationId xmlns:p14="http://schemas.microsoft.com/office/powerpoint/2010/main" val="1024086991"/>
+        <p14:creationId xmlns:p14="http://schemas.microsoft.com/office/powerpoint/2010/main" val="2093838115"/>
       </p:ext>
     </p:extLst>
   </p:cSld>
@@ -514,10 +295,6 @@
           <a:bodyPr/>
           <a:lstStyle/>
           <a:p>
-            <a:r>
-              <a:rPr lang="en-US" dirty="0"/>
-              <a:t/>
-            </a:r>
             <a:endParaRPr lang="en-US" dirty="0"/>
           </a:p>
         </p:txBody>
@@ -602,10 +379,6 @@
           <a:bodyPr/>
           <a:lstStyle/>
           <a:p>
-            <a:r>
-              <a:rPr lang="en-US" dirty="0"/>
-              <a:t/>
-            </a:r>
             <a:endParaRPr lang="en-US" dirty="0"/>
           </a:p>
         </p:txBody>
@@ -690,10 +463,6 @@
           <a:bodyPr/>
           <a:lstStyle/>
           <a:p>
-            <a:r>
-              <a:rPr lang="en-US" dirty="0"/>
-              <a:t/>
-            </a:r>
             <a:endParaRPr lang="en-US" dirty="0"/>
           </a:p>
         </p:txBody>
@@ -778,10 +547,6 @@
           <a:bodyPr/>
           <a:lstStyle/>
           <a:p>
-            <a:r>
-              <a:rPr lang="en-US" dirty="0"/>
-              <a:t/>
-            </a:r>
             <a:endParaRPr lang="en-US" dirty="0"/>
           </a:p>
         </p:txBody>
@@ -866,10 +631,6 @@
           <a:bodyPr/>
           <a:lstStyle/>
           <a:p>
-            <a:r>
-              <a:rPr lang="en-US" dirty="0"/>
-              <a:t/>
-            </a:r>
             <a:endParaRPr lang="en-US" dirty="0"/>
           </a:p>
         </p:txBody>
@@ -954,10 +715,6 @@
           <a:bodyPr/>
           <a:lstStyle/>
           <a:p>
-            <a:r>
-              <a:rPr lang="en-US" dirty="0"/>
-              <a:t/>
-            </a:r>
             <a:endParaRPr lang="en-US" dirty="0"/>
           </a:p>
         </p:txBody>
@@ -1042,10 +799,6 @@
           <a:bodyPr/>
           <a:lstStyle/>
           <a:p>
-            <a:r>
-              <a:rPr lang="en-US" dirty="0"/>
-              <a:t/>
-            </a:r>
             <a:endParaRPr lang="en-US" dirty="0"/>
           </a:p>
         </p:txBody>
@@ -1130,10 +883,6 @@
           <a:bodyPr/>
           <a:lstStyle/>
           <a:p>
-            <a:r>
-              <a:rPr lang="en-US" dirty="0"/>
-              <a:t/>
-            </a:r>
             <a:endParaRPr lang="en-US" dirty="0"/>
           </a:p>
         </p:txBody>
@@ -1218,10 +967,6 @@
           <a:bodyPr/>
           <a:lstStyle/>
           <a:p>
-            <a:r>
-              <a:rPr lang="en-US" dirty="0"/>
-              <a:t/>
-            </a:r>
             <a:endParaRPr lang="en-US" dirty="0"/>
           </a:p>
         </p:txBody>
@@ -1306,10 +1051,6 @@
           <a:bodyPr/>
           <a:lstStyle/>
           <a:p>
-            <a:r>
-              <a:rPr lang="en-US" dirty="0"/>
-              <a:t/>
-            </a:r>
             <a:endParaRPr lang="en-US" dirty="0"/>
           </a:p>
         </p:txBody>
@@ -1394,10 +1135,6 @@
           <a:bodyPr/>
           <a:lstStyle/>
           <a:p>
-            <a:r>
-              <a:rPr lang="en-US" dirty="0"/>
-              <a:t/>
-            </a:r>
             <a:endParaRPr lang="en-US" dirty="0"/>
           </a:p>
         </p:txBody>
@@ -1482,10 +1219,6 @@
           <a:bodyPr/>
           <a:lstStyle/>
           <a:p>
-            <a:r>
-              <a:rPr lang="en-US" dirty="0"/>
-              <a:t/>
-            </a:r>
             <a:endParaRPr lang="en-US" dirty="0"/>
           </a:p>
         </p:txBody>
@@ -1570,10 +1303,6 @@
           <a:bodyPr/>
           <a:lstStyle/>
           <a:p>
-            <a:r>
-              <a:rPr lang="en-US" dirty="0"/>
-              <a:t/>
-            </a:r>
             <a:endParaRPr lang="en-US" dirty="0"/>
           </a:p>
         </p:txBody>
@@ -1658,10 +1387,6 @@
           <a:bodyPr/>
           <a:lstStyle/>
           <a:p>
-            <a:r>
-              <a:rPr lang="en-US" dirty="0"/>
-              <a:t/>
-            </a:r>
             <a:endParaRPr lang="en-US" dirty="0"/>
           </a:p>
         </p:txBody>
@@ -1746,10 +1471,6 @@
           <a:bodyPr/>
           <a:lstStyle/>
           <a:p>
-            <a:r>
-              <a:rPr lang="en-US" dirty="0"/>
-              <a:t/>
-            </a:r>
             <a:endParaRPr lang="en-US" dirty="0"/>
           </a:p>
         </p:txBody>
@@ -1823,6 +1544,11 @@
 <file path=ppt/slideMasters/slideMaster1.xml><?xml version="1.0" encoding="utf-8"?>
 <p:sldMaster xmlns:a="http://schemas.openxmlformats.org/drawingml/2006/main" xmlns:r="http://schemas.openxmlformats.org/officeDocument/2006/relationships" xmlns:p="http://schemas.openxmlformats.org/presentationml/2006/main">
   <p:cSld>
+    <p:bg>
+      <p:bgRef idx="1001">
+        <a:schemeClr val="bg1"/>
+      </p:bgRef>
+    </p:bg>
     <p:spTree>
       <p:nvGrpSpPr>
         <p:cNvPr id="1" name=""/>
@@ -2105,6 +1831,7 @@
         <a:solidFill>
           <a:srgbClr val="065A82"/>
         </a:solidFill>
+        <a:effectLst/>
       </p:bgPr>
     </p:bg>
     <p:spTree>
@@ -2142,7 +1869,7 @@
           <a:bodyPr wrap="square" rtlCol="0" anchor="ctr"/>
           <a:lstStyle/>
           <a:p>
-            <a:pPr algn="ctr" indent="0" marL="0">
+            <a:pPr marL="0" indent="0" algn="ctr">
               <a:buNone/>
             </a:pPr>
             <a:r>
@@ -2178,7 +1905,7 @@
           <a:bodyPr wrap="square" rtlCol="0" anchor="ctr"/>
           <a:lstStyle/>
           <a:p>
-            <a:pPr algn="ctr" indent="0" marL="0">
+            <a:pPr marL="0" indent="0" algn="ctr">
               <a:buNone/>
             </a:pPr>
             <a:r>
@@ -2214,7 +1941,7 @@
           <a:bodyPr wrap="square" rtlCol="0" anchor="ctr"/>
           <a:lstStyle/>
           <a:p>
-            <a:pPr algn="ctr" indent="0" marL="0">
+            <a:pPr marL="0" indent="0" algn="ctr">
               <a:buNone/>
             </a:pPr>
             <a:r>
@@ -2275,7 +2002,7 @@
           <a:bodyPr wrap="square" rtlCol="0" anchor="ctr"/>
           <a:lstStyle/>
           <a:p>
-            <a:pPr indent="0" marL="0">
+            <a:pPr marL="0" indent="0">
               <a:buNone/>
             </a:pPr>
             <a:r>
@@ -2306,16 +2033,34 @@
         </p:nvGraphicFramePr>
         <p:xfrm>
           <a:off x="457200" y="1005840"/>
-          <a:ext cx="8229600" cy="3291840"/>
+          <a:ext cx="8229600" cy="3730752"/>
         </p:xfrm>
         <a:graphic>
           <a:graphicData uri="http://schemas.openxmlformats.org/drawingml/2006/table">
             <a:tbl>
               <a:tblPr/>
               <a:tblGrid>
-                <a:gridCol w="2743200"/>
-                <a:gridCol w="2743200"/>
-                <a:gridCol w="2743200"/>
+                <a:gridCol w="2743200">
+                  <a:extLst>
+                    <a:ext uri="{9D8B030D-6E8A-4147-A177-3AD203B41FA5}">
+                      <a16:colId xmlns:a16="http://schemas.microsoft.com/office/drawing/2014/main" val="20000"/>
+                    </a:ext>
+                  </a:extLst>
+                </a:gridCol>
+                <a:gridCol w="2743200">
+                  <a:extLst>
+                    <a:ext uri="{9D8B030D-6E8A-4147-A177-3AD203B41FA5}">
+                      <a16:colId xmlns:a16="http://schemas.microsoft.com/office/drawing/2014/main" val="20001"/>
+                    </a:ext>
+                  </a:extLst>
+                </a:gridCol>
+                <a:gridCol w="2743200">
+                  <a:extLst>
+                    <a:ext uri="{9D8B030D-6E8A-4147-A177-3AD203B41FA5}">
+                      <a16:colId xmlns:a16="http://schemas.microsoft.com/office/drawing/2014/main" val="20002"/>
+                    </a:ext>
+                  </a:extLst>
+                </a:gridCol>
               </a:tblGrid>
               <a:tr h="466344">
                 <a:tc>
@@ -2323,7 +2068,7 @@
                     <a:bodyPr/>
                     <a:lstStyle/>
                     <a:p>
-                      <a:pPr algn="l" indent="0" marL="0">
+                      <a:pPr marL="0" indent="0" algn="l">
                         <a:buNone/>
                       </a:pPr>
                       <a:r>
@@ -2337,7 +2082,7 @@
                       <a:endParaRPr lang="en-US" sz="1200" dirty="0"/>
                     </a:p>
                   </a:txBody>
-                  <a:tcPr marL="91440" marR="91440" marT="45720" marB="45720" anchor="ctr">
+                  <a:tcPr anchor="ctr">
                     <a:lnL w="12700" cap="flat" cmpd="sng" algn="ctr">
                       <a:solidFill>
                         <a:srgbClr val="CCCCCC"/>
@@ -2384,7 +2129,7 @@
                     <a:bodyPr/>
                     <a:lstStyle/>
                     <a:p>
-                      <a:pPr algn="l" indent="0" marL="0">
+                      <a:pPr marL="0" indent="0" algn="l">
                         <a:buNone/>
                       </a:pPr>
                       <a:r>
@@ -2398,7 +2143,7 @@
                       <a:endParaRPr lang="en-US" sz="1200" dirty="0"/>
                     </a:p>
                   </a:txBody>
-                  <a:tcPr marL="91440" marR="91440" marT="45720" marB="45720" anchor="ctr">
+                  <a:tcPr anchor="ctr">
                     <a:lnL w="12700" cap="flat" cmpd="sng" algn="ctr">
                       <a:solidFill>
                         <a:srgbClr val="CCCCCC"/>
@@ -2445,7 +2190,7 @@
                     <a:bodyPr/>
                     <a:lstStyle/>
                     <a:p>
-                      <a:pPr algn="l" indent="0" marL="0">
+                      <a:pPr marL="0" indent="0" algn="l">
                         <a:buNone/>
                       </a:pPr>
                       <a:r>
@@ -2459,7 +2204,7 @@
                       <a:endParaRPr lang="en-US" sz="1200" dirty="0"/>
                     </a:p>
                   </a:txBody>
-                  <a:tcPr marL="91440" marR="91440" marT="45720" marB="45720" anchor="ctr">
+                  <a:tcPr anchor="ctr">
                     <a:lnL w="12700" cap="flat" cmpd="sng" algn="ctr">
                       <a:solidFill>
                         <a:srgbClr val="CCCCCC"/>
@@ -2501,6 +2246,11 @@
                     </a:solidFill>
                   </a:tcPr>
                 </a:tc>
+                <a:extLst>
+                  <a:ext uri="{0D108BD9-81ED-4DB2-BD59-A6C34878D82A}">
+                    <a16:rowId xmlns:a16="http://schemas.microsoft.com/office/drawing/2014/main" val="10000"/>
+                  </a:ext>
+                </a:extLst>
               </a:tr>
               <a:tr h="466344">
                 <a:tc>
@@ -2508,7 +2258,7 @@
                     <a:bodyPr/>
                     <a:lstStyle/>
                     <a:p>
-                      <a:pPr algn="l" indent="0" marL="0">
+                      <a:pPr marL="0" indent="0" algn="l">
                         <a:buNone/>
                       </a:pPr>
                       <a:r>
@@ -2522,7 +2272,7 @@
                       <a:endParaRPr lang="en-US" sz="1200" dirty="0"/>
                     </a:p>
                   </a:txBody>
-                  <a:tcPr marL="91440" marR="91440" marT="45720" marB="45720" anchor="ctr">
+                  <a:tcPr anchor="ctr">
                     <a:lnL w="12700" cap="flat" cmpd="sng" algn="ctr">
                       <a:solidFill>
                         <a:srgbClr val="CCCCCC"/>
@@ -2569,7 +2319,7 @@
                     <a:bodyPr/>
                     <a:lstStyle/>
                     <a:p>
-                      <a:pPr algn="l" indent="0" marL="0">
+                      <a:pPr marL="0" indent="0" algn="l">
                         <a:buNone/>
                       </a:pPr>
                       <a:r>
@@ -2583,7 +2333,7 @@
                       <a:endParaRPr lang="en-US" sz="1200" dirty="0"/>
                     </a:p>
                   </a:txBody>
-                  <a:tcPr marL="91440" marR="91440" marT="45720" marB="45720" anchor="ctr">
+                  <a:tcPr anchor="ctr">
                     <a:lnL w="12700" cap="flat" cmpd="sng" algn="ctr">
                       <a:solidFill>
                         <a:srgbClr val="CCCCCC"/>
@@ -2630,7 +2380,7 @@
                     <a:bodyPr/>
                     <a:lstStyle/>
                     <a:p>
-                      <a:pPr algn="l" indent="0" marL="0">
+                      <a:pPr marL="0" indent="0" algn="l">
                         <a:buNone/>
                       </a:pPr>
                       <a:r>
@@ -2644,7 +2394,7 @@
                       <a:endParaRPr lang="en-US" sz="1200" dirty="0"/>
                     </a:p>
                   </a:txBody>
-                  <a:tcPr marL="91440" marR="91440" marT="45720" marB="45720" anchor="ctr">
+                  <a:tcPr anchor="ctr">
                     <a:lnL w="12700" cap="flat" cmpd="sng" algn="ctr">
                       <a:solidFill>
                         <a:srgbClr val="CCCCCC"/>
@@ -2686,6 +2436,11 @@
                     </a:solidFill>
                   </a:tcPr>
                 </a:tc>
+                <a:extLst>
+                  <a:ext uri="{0D108BD9-81ED-4DB2-BD59-A6C34878D82A}">
+                    <a16:rowId xmlns:a16="http://schemas.microsoft.com/office/drawing/2014/main" val="10001"/>
+                  </a:ext>
+                </a:extLst>
               </a:tr>
               <a:tr h="466344">
                 <a:tc>
@@ -2693,7 +2448,7 @@
                     <a:bodyPr/>
                     <a:lstStyle/>
                     <a:p>
-                      <a:pPr algn="l" indent="0" marL="0">
+                      <a:pPr marL="0" indent="0" algn="l">
                         <a:buNone/>
                       </a:pPr>
                       <a:r>
@@ -2707,7 +2462,7 @@
                       <a:endParaRPr lang="en-US" sz="1200" dirty="0"/>
                     </a:p>
                   </a:txBody>
-                  <a:tcPr marL="91440" marR="91440" marT="45720" marB="45720" anchor="ctr">
+                  <a:tcPr anchor="ctr">
                     <a:lnL w="12700" cap="flat" cmpd="sng" algn="ctr">
                       <a:solidFill>
                         <a:srgbClr val="CCCCCC"/>
@@ -2754,7 +2509,7 @@
                     <a:bodyPr/>
                     <a:lstStyle/>
                     <a:p>
-                      <a:pPr algn="l" indent="0" marL="0">
+                      <a:pPr marL="0" indent="0" algn="l">
                         <a:buNone/>
                       </a:pPr>
                       <a:r>
@@ -2768,7 +2523,7 @@
                       <a:endParaRPr lang="en-US" sz="1200" dirty="0"/>
                     </a:p>
                   </a:txBody>
-                  <a:tcPr marL="91440" marR="91440" marT="45720" marB="45720" anchor="ctr">
+                  <a:tcPr anchor="ctr">
                     <a:lnL w="12700" cap="flat" cmpd="sng" algn="ctr">
                       <a:solidFill>
                         <a:srgbClr val="CCCCCC"/>
@@ -2815,7 +2570,7 @@
                     <a:bodyPr/>
                     <a:lstStyle/>
                     <a:p>
-                      <a:pPr algn="l" indent="0" marL="0">
+                      <a:pPr marL="0" indent="0" algn="l">
                         <a:buNone/>
                       </a:pPr>
                       <a:r>
@@ -2829,7 +2584,7 @@
                       <a:endParaRPr lang="en-US" sz="1200" dirty="0"/>
                     </a:p>
                   </a:txBody>
-                  <a:tcPr marL="91440" marR="91440" marT="45720" marB="45720" anchor="ctr">
+                  <a:tcPr anchor="ctr">
                     <a:lnL w="12700" cap="flat" cmpd="sng" algn="ctr">
                       <a:solidFill>
                         <a:srgbClr val="CCCCCC"/>
@@ -2871,6 +2626,11 @@
                     </a:solidFill>
                   </a:tcPr>
                 </a:tc>
+                <a:extLst>
+                  <a:ext uri="{0D108BD9-81ED-4DB2-BD59-A6C34878D82A}">
+                    <a16:rowId xmlns:a16="http://schemas.microsoft.com/office/drawing/2014/main" val="10002"/>
+                  </a:ext>
+                </a:extLst>
               </a:tr>
               <a:tr h="466344">
                 <a:tc>
@@ -2878,7 +2638,7 @@
                     <a:bodyPr/>
                     <a:lstStyle/>
                     <a:p>
-                      <a:pPr algn="l" indent="0" marL="0">
+                      <a:pPr marL="0" indent="0" algn="l">
                         <a:buNone/>
                       </a:pPr>
                       <a:r>
@@ -2892,7 +2652,7 @@
                       <a:endParaRPr lang="en-US" sz="1200" dirty="0"/>
                     </a:p>
                   </a:txBody>
-                  <a:tcPr marL="91440" marR="91440" marT="45720" marB="45720" anchor="ctr">
+                  <a:tcPr anchor="ctr">
                     <a:lnL w="12700" cap="flat" cmpd="sng" algn="ctr">
                       <a:solidFill>
                         <a:srgbClr val="CCCCCC"/>
@@ -2939,7 +2699,7 @@
                     <a:bodyPr/>
                     <a:lstStyle/>
                     <a:p>
-                      <a:pPr algn="l" indent="0" marL="0">
+                      <a:pPr marL="0" indent="0" algn="l">
                         <a:buNone/>
                       </a:pPr>
                       <a:r>
@@ -2953,7 +2713,7 @@
                       <a:endParaRPr lang="en-US" sz="1200" dirty="0"/>
                     </a:p>
                   </a:txBody>
-                  <a:tcPr marL="91440" marR="91440" marT="45720" marB="45720" anchor="ctr">
+                  <a:tcPr anchor="ctr">
                     <a:lnL w="12700" cap="flat" cmpd="sng" algn="ctr">
                       <a:solidFill>
                         <a:srgbClr val="CCCCCC"/>
@@ -3000,7 +2760,7 @@
                     <a:bodyPr/>
                     <a:lstStyle/>
                     <a:p>
-                      <a:pPr algn="l" indent="0" marL="0">
+                      <a:pPr marL="0" indent="0" algn="l">
                         <a:buNone/>
                       </a:pPr>
                       <a:r>
@@ -3014,7 +2774,7 @@
                       <a:endParaRPr lang="en-US" sz="1200" dirty="0"/>
                     </a:p>
                   </a:txBody>
-                  <a:tcPr marL="91440" marR="91440" marT="45720" marB="45720" anchor="ctr">
+                  <a:tcPr anchor="ctr">
                     <a:lnL w="12700" cap="flat" cmpd="sng" algn="ctr">
                       <a:solidFill>
                         <a:srgbClr val="CCCCCC"/>
@@ -3056,6 +2816,11 @@
                     </a:solidFill>
                   </a:tcPr>
                 </a:tc>
+                <a:extLst>
+                  <a:ext uri="{0D108BD9-81ED-4DB2-BD59-A6C34878D82A}">
+                    <a16:rowId xmlns:a16="http://schemas.microsoft.com/office/drawing/2014/main" val="10003"/>
+                  </a:ext>
+                </a:extLst>
               </a:tr>
               <a:tr h="466344">
                 <a:tc>
@@ -3063,7 +2828,7 @@
                     <a:bodyPr/>
                     <a:lstStyle/>
                     <a:p>
-                      <a:pPr algn="l" indent="0" marL="0">
+                      <a:pPr marL="0" indent="0" algn="l">
                         <a:buNone/>
                       </a:pPr>
                       <a:r>
@@ -3077,7 +2842,7 @@
                       <a:endParaRPr lang="en-US" sz="1200" dirty="0"/>
                     </a:p>
                   </a:txBody>
-                  <a:tcPr marL="91440" marR="91440" marT="45720" marB="45720" anchor="ctr">
+                  <a:tcPr anchor="ctr">
                     <a:lnL w="12700" cap="flat" cmpd="sng" algn="ctr">
                       <a:solidFill>
                         <a:srgbClr val="CCCCCC"/>
@@ -3124,7 +2889,7 @@
                     <a:bodyPr/>
                     <a:lstStyle/>
                     <a:p>
-                      <a:pPr algn="l" indent="0" marL="0">
+                      <a:pPr marL="0" indent="0" algn="l">
                         <a:buNone/>
                       </a:pPr>
                       <a:r>
@@ -3138,7 +2903,7 @@
                       <a:endParaRPr lang="en-US" sz="1200" dirty="0"/>
                     </a:p>
                   </a:txBody>
-                  <a:tcPr marL="91440" marR="91440" marT="45720" marB="45720" anchor="ctr">
+                  <a:tcPr anchor="ctr">
                     <a:lnL w="12700" cap="flat" cmpd="sng" algn="ctr">
                       <a:solidFill>
                         <a:srgbClr val="CCCCCC"/>
@@ -3185,7 +2950,7 @@
                     <a:bodyPr/>
                     <a:lstStyle/>
                     <a:p>
-                      <a:pPr algn="l" indent="0" marL="0">
+                      <a:pPr marL="0" indent="0" algn="l">
                         <a:buNone/>
                       </a:pPr>
                       <a:r>
@@ -3199,7 +2964,7 @@
                       <a:endParaRPr lang="en-US" sz="1200" dirty="0"/>
                     </a:p>
                   </a:txBody>
-                  <a:tcPr marL="91440" marR="91440" marT="45720" marB="45720" anchor="ctr">
+                  <a:tcPr anchor="ctr">
                     <a:lnL w="12700" cap="flat" cmpd="sng" algn="ctr">
                       <a:solidFill>
                         <a:srgbClr val="CCCCCC"/>
@@ -3241,6 +3006,11 @@
                     </a:solidFill>
                   </a:tcPr>
                 </a:tc>
+                <a:extLst>
+                  <a:ext uri="{0D108BD9-81ED-4DB2-BD59-A6C34878D82A}">
+                    <a16:rowId xmlns:a16="http://schemas.microsoft.com/office/drawing/2014/main" val="10004"/>
+                  </a:ext>
+                </a:extLst>
               </a:tr>
               <a:tr h="466344">
                 <a:tc>
@@ -3248,7 +3018,7 @@
                     <a:bodyPr/>
                     <a:lstStyle/>
                     <a:p>
-                      <a:pPr algn="l" indent="0" marL="0">
+                      <a:pPr marL="0" indent="0" algn="l">
                         <a:buNone/>
                       </a:pPr>
                       <a:r>
@@ -3262,7 +3032,7 @@
                       <a:endParaRPr lang="en-US" sz="1200" dirty="0"/>
                     </a:p>
                   </a:txBody>
-                  <a:tcPr marL="91440" marR="91440" marT="45720" marB="45720" anchor="ctr">
+                  <a:tcPr anchor="ctr">
                     <a:lnL w="12700" cap="flat" cmpd="sng" algn="ctr">
                       <a:solidFill>
                         <a:srgbClr val="CCCCCC"/>
@@ -3309,7 +3079,7 @@
                     <a:bodyPr/>
                     <a:lstStyle/>
                     <a:p>
-                      <a:pPr algn="l" indent="0" marL="0">
+                      <a:pPr marL="0" indent="0" algn="l">
                         <a:buNone/>
                       </a:pPr>
                       <a:r>
@@ -3323,7 +3093,7 @@
                       <a:endParaRPr lang="en-US" sz="1200" dirty="0"/>
                     </a:p>
                   </a:txBody>
-                  <a:tcPr marL="91440" marR="91440" marT="45720" marB="45720" anchor="ctr">
+                  <a:tcPr anchor="ctr">
                     <a:lnL w="12700" cap="flat" cmpd="sng" algn="ctr">
                       <a:solidFill>
                         <a:srgbClr val="CCCCCC"/>
@@ -3370,7 +3140,7 @@
                     <a:bodyPr/>
                     <a:lstStyle/>
                     <a:p>
-                      <a:pPr algn="l" indent="0" marL="0">
+                      <a:pPr marL="0" indent="0" algn="l">
                         <a:buNone/>
                       </a:pPr>
                       <a:r>
@@ -3384,7 +3154,7 @@
                       <a:endParaRPr lang="en-US" sz="1200" dirty="0"/>
                     </a:p>
                   </a:txBody>
-                  <a:tcPr marL="91440" marR="91440" marT="45720" marB="45720" anchor="ctr">
+                  <a:tcPr anchor="ctr">
                     <a:lnL w="12700" cap="flat" cmpd="sng" algn="ctr">
                       <a:solidFill>
                         <a:srgbClr val="CCCCCC"/>
@@ -3426,6 +3196,11 @@
                     </a:solidFill>
                   </a:tcPr>
                 </a:tc>
+                <a:extLst>
+                  <a:ext uri="{0D108BD9-81ED-4DB2-BD59-A6C34878D82A}">
+                    <a16:rowId xmlns:a16="http://schemas.microsoft.com/office/drawing/2014/main" val="10005"/>
+                  </a:ext>
+                </a:extLst>
               </a:tr>
               <a:tr h="466344">
                 <a:tc>
@@ -3433,7 +3208,7 @@
                     <a:bodyPr/>
                     <a:lstStyle/>
                     <a:p>
-                      <a:pPr algn="l" indent="0" marL="0">
+                      <a:pPr marL="0" indent="0" algn="l">
                         <a:buNone/>
                       </a:pPr>
                       <a:r>
@@ -3447,7 +3222,7 @@
                       <a:endParaRPr lang="en-US" sz="1200" dirty="0"/>
                     </a:p>
                   </a:txBody>
-                  <a:tcPr marL="91440" marR="91440" marT="45720" marB="45720" anchor="ctr">
+                  <a:tcPr anchor="ctr">
                     <a:lnL w="12700" cap="flat" cmpd="sng" algn="ctr">
                       <a:solidFill>
                         <a:srgbClr val="CCCCCC"/>
@@ -3494,7 +3269,7 @@
                     <a:bodyPr/>
                     <a:lstStyle/>
                     <a:p>
-                      <a:pPr algn="l" indent="0" marL="0">
+                      <a:pPr marL="0" indent="0" algn="l">
                         <a:buNone/>
                       </a:pPr>
                       <a:r>
@@ -3508,7 +3283,7 @@
                       <a:endParaRPr lang="en-US" sz="1200" dirty="0"/>
                     </a:p>
                   </a:txBody>
-                  <a:tcPr marL="91440" marR="91440" marT="45720" marB="45720" anchor="ctr">
+                  <a:tcPr anchor="ctr">
                     <a:lnL w="12700" cap="flat" cmpd="sng" algn="ctr">
                       <a:solidFill>
                         <a:srgbClr val="CCCCCC"/>
@@ -3555,7 +3330,7 @@
                     <a:bodyPr/>
                     <a:lstStyle/>
                     <a:p>
-                      <a:pPr algn="l" indent="0" marL="0">
+                      <a:pPr marL="0" indent="0" algn="l">
                         <a:buNone/>
                       </a:pPr>
                       <a:r>
@@ -3569,7 +3344,7 @@
                       <a:endParaRPr lang="en-US" sz="1200" dirty="0"/>
                     </a:p>
                   </a:txBody>
-                  <a:tcPr marL="91440" marR="91440" marT="45720" marB="45720" anchor="ctr">
+                  <a:tcPr anchor="ctr">
                     <a:lnL w="12700" cap="flat" cmpd="sng" algn="ctr">
                       <a:solidFill>
                         <a:srgbClr val="CCCCCC"/>
@@ -3611,6 +3386,11 @@
                     </a:solidFill>
                   </a:tcPr>
                 </a:tc>
+                <a:extLst>
+                  <a:ext uri="{0D108BD9-81ED-4DB2-BD59-A6C34878D82A}">
+                    <a16:rowId xmlns:a16="http://schemas.microsoft.com/office/drawing/2014/main" val="10006"/>
+                  </a:ext>
+                </a:extLst>
               </a:tr>
               <a:tr h="466344">
                 <a:tc>
@@ -3618,7 +3398,7 @@
                     <a:bodyPr/>
                     <a:lstStyle/>
                     <a:p>
-                      <a:pPr algn="l" indent="0" marL="0">
+                      <a:pPr marL="0" indent="0" algn="l">
                         <a:buNone/>
                       </a:pPr>
                       <a:r>
@@ -3632,7 +3412,7 @@
                       <a:endParaRPr lang="en-US" sz="1200" dirty="0"/>
                     </a:p>
                   </a:txBody>
-                  <a:tcPr marL="91440" marR="91440" marT="45720" marB="45720" anchor="ctr">
+                  <a:tcPr anchor="ctr">
                     <a:lnL w="12700" cap="flat" cmpd="sng" algn="ctr">
                       <a:solidFill>
                         <a:srgbClr val="CCCCCC"/>
@@ -3679,7 +3459,7 @@
                     <a:bodyPr/>
                     <a:lstStyle/>
                     <a:p>
-                      <a:pPr algn="l" indent="0" marL="0">
+                      <a:pPr marL="0" indent="0" algn="l">
                         <a:buNone/>
                       </a:pPr>
                       <a:r>
@@ -3693,7 +3473,7 @@
                       <a:endParaRPr lang="en-US" sz="1200" dirty="0"/>
                     </a:p>
                   </a:txBody>
-                  <a:tcPr marL="91440" marR="91440" marT="45720" marB="45720" anchor="ctr">
+                  <a:tcPr anchor="ctr">
                     <a:lnL w="12700" cap="flat" cmpd="sng" algn="ctr">
                       <a:solidFill>
                         <a:srgbClr val="CCCCCC"/>
@@ -3740,7 +3520,7 @@
                     <a:bodyPr/>
                     <a:lstStyle/>
                     <a:p>
-                      <a:pPr algn="l" indent="0" marL="0">
+                      <a:pPr marL="0" indent="0" algn="l">
                         <a:buNone/>
                       </a:pPr>
                       <a:r>
@@ -3754,7 +3534,7 @@
                       <a:endParaRPr lang="en-US" sz="1200" dirty="0"/>
                     </a:p>
                   </a:txBody>
-                  <a:tcPr marL="91440" marR="91440" marT="45720" marB="45720" anchor="ctr">
+                  <a:tcPr anchor="ctr">
                     <a:lnL w="12700" cap="flat" cmpd="sng" algn="ctr">
                       <a:solidFill>
                         <a:srgbClr val="CCCCCC"/>
@@ -3796,6 +3576,11 @@
                     </a:solidFill>
                   </a:tcPr>
                 </a:tc>
+                <a:extLst>
+                  <a:ext uri="{0D108BD9-81ED-4DB2-BD59-A6C34878D82A}">
+                    <a16:rowId xmlns:a16="http://schemas.microsoft.com/office/drawing/2014/main" val="10007"/>
+                  </a:ext>
+                </a:extLst>
               </a:tr>
             </a:tbl>
           </a:graphicData>
@@ -3822,7 +3607,7 @@
           <a:bodyPr wrap="square" rtlCol="0" anchor="ctr"/>
           <a:lstStyle/>
           <a:p>
-            <a:pPr algn="r" indent="0" marL="0">
+            <a:pPr marL="0" indent="0" algn="r">
               <a:buNone/>
             </a:pPr>
             <a:r>
@@ -3883,7 +3668,7 @@
           <a:bodyPr wrap="square" rtlCol="0" anchor="ctr"/>
           <a:lstStyle/>
           <a:p>
-            <a:pPr indent="0" marL="0">
+            <a:pPr marL="0" indent="0">
               <a:buNone/>
             </a:pPr>
             <a:r>
@@ -3906,7 +3691,7 @@
         </p:nvSpPr>
         <p:spPr>
           <a:xfrm>
-            <a:off x="457200" y="914400"/>
+            <a:off x="457200" y="1097280"/>
             <a:ext cx="4023360" cy="3474720"/>
           </a:xfrm>
           <a:prstGeom prst="rect">
@@ -3939,7 +3724,7 @@
           <a:bodyPr wrap="square" rtlCol="0" anchor="ctr"/>
           <a:lstStyle/>
           <a:p>
-            <a:pPr indent="0" marL="0">
+            <a:pPr marL="0" indent="0">
               <a:buNone/>
             </a:pPr>
             <a:r>
@@ -3975,7 +3760,7 @@
           <a:bodyPr wrap="square" rtlCol="0" anchor="ctr"/>
           <a:lstStyle/>
           <a:p>
-            <a:pPr indent="0" marL="0">
+            <a:pPr marL="0" indent="0">
               <a:buNone/>
             </a:pPr>
             <a:r>
@@ -3992,7 +3777,7 @@
             <a:endParaRPr lang="en-US" sz="1100" dirty="0"/>
           </a:p>
           <a:p>
-            <a:pPr indent="0" marL="0">
+            <a:pPr marL="0" indent="0">
               <a:buNone/>
             </a:pPr>
             <a:r>
@@ -4009,7 +3794,7 @@
             <a:endParaRPr lang="en-US" sz="1100" dirty="0"/>
           </a:p>
           <a:p>
-            <a:pPr indent="0" marL="0">
+            <a:pPr marL="0" indent="0">
               <a:buNone/>
             </a:pPr>
             <a:r>
@@ -4026,7 +3811,7 @@
             <a:endParaRPr lang="en-US" sz="1100" dirty="0"/>
           </a:p>
           <a:p>
-            <a:pPr indent="0" marL="0">
+            <a:pPr marL="0" indent="0">
               <a:buNone/>
             </a:pPr>
             <a:r>
@@ -4043,7 +3828,7 @@
             <a:endParaRPr lang="en-US" sz="1100" dirty="0"/>
           </a:p>
           <a:p>
-            <a:pPr indent="0" marL="0">
+            <a:pPr marL="0" indent="0">
               <a:buNone/>
             </a:pPr>
             <a:r>
@@ -4060,7 +3845,7 @@
             <a:endParaRPr lang="en-US" sz="1100" dirty="0"/>
           </a:p>
           <a:p>
-            <a:pPr indent="0" marL="0">
+            <a:pPr marL="0" indent="0">
               <a:buNone/>
             </a:pPr>
             <a:r>
@@ -4099,7 +3884,7 @@
           <a:bodyPr wrap="square" rtlCol="0" anchor="ctr"/>
           <a:lstStyle/>
           <a:p>
-            <a:pPr indent="0" marL="0">
+            <a:pPr marL="0" indent="0">
               <a:buNone/>
             </a:pPr>
             <a:r>
@@ -4135,7 +3920,7 @@
           <a:bodyPr wrap="square" rtlCol="0" anchor="ctr"/>
           <a:lstStyle/>
           <a:p>
-            <a:pPr indent="0" marL="0">
+            <a:pPr marL="0" indent="0">
               <a:buNone/>
             </a:pPr>
             <a:r>
@@ -4149,7 +3934,7 @@
             <a:endParaRPr lang="en-US" sz="1100" dirty="0"/>
           </a:p>
           <a:p>
-            <a:pPr indent="0" marL="0">
+            <a:pPr marL="0" indent="0">
               <a:buNone/>
             </a:pPr>
             <a:r>
@@ -4163,7 +3948,7 @@
             <a:endParaRPr lang="en-US" sz="1100" dirty="0"/>
           </a:p>
           <a:p>
-            <a:pPr indent="0" marL="0">
+            <a:pPr marL="0" indent="0">
               <a:buNone/>
             </a:pPr>
             <a:r>
@@ -4177,7 +3962,7 @@
             <a:endParaRPr lang="en-US" sz="1100" dirty="0"/>
           </a:p>
           <a:p>
-            <a:pPr indent="0" marL="0">
+            <a:pPr marL="0" indent="0">
               <a:buNone/>
             </a:pPr>
             <a:r>
@@ -4200,7 +3985,7 @@
         </p:nvSpPr>
         <p:spPr>
           <a:xfrm>
-            <a:off x="4663440" y="914400"/>
+            <a:off x="4663440" y="1097280"/>
             <a:ext cx="4023360" cy="3474720"/>
           </a:xfrm>
           <a:prstGeom prst="rect">
@@ -4233,7 +4018,7 @@
           <a:bodyPr wrap="square" rtlCol="0" anchor="ctr"/>
           <a:lstStyle/>
           <a:p>
-            <a:pPr indent="0" marL="0">
+            <a:pPr marL="0" indent="0">
               <a:buNone/>
             </a:pPr>
             <a:r>
@@ -4269,7 +4054,7 @@
           <a:bodyPr wrap="square" rtlCol="0" anchor="ctr"/>
           <a:lstStyle/>
           <a:p>
-            <a:pPr indent="0" marL="0">
+            <a:pPr marL="0" indent="0">
               <a:buNone/>
             </a:pPr>
             <a:r>
@@ -4286,7 +4071,7 @@
             <a:endParaRPr lang="en-US" sz="1100" dirty="0"/>
           </a:p>
           <a:p>
-            <a:pPr indent="0" marL="0">
+            <a:pPr marL="0" indent="0">
               <a:buNone/>
             </a:pPr>
             <a:r>
@@ -4303,13 +4088,13 @@
             <a:endParaRPr lang="en-US" sz="1100" dirty="0"/>
           </a:p>
           <a:p>
-            <a:pPr indent="0" marL="0">
+            <a:pPr marL="0" indent="0">
               <a:buNone/>
             </a:pPr>
             <a:endParaRPr lang="en-US" sz="1100" dirty="0"/>
           </a:p>
           <a:p>
-            <a:pPr indent="0" marL="0">
+            <a:pPr marL="0" indent="0">
               <a:buNone/>
             </a:pPr>
             <a:r>
@@ -4326,7 +4111,7 @@
             <a:endParaRPr lang="en-US" sz="1100" dirty="0"/>
           </a:p>
           <a:p>
-            <a:pPr indent="0" marL="0">
+            <a:pPr marL="0" indent="0">
               <a:buNone/>
             </a:pPr>
             <a:r>
@@ -4365,7 +4150,7 @@
           <a:bodyPr wrap="square" rtlCol="0" anchor="ctr"/>
           <a:lstStyle/>
           <a:p>
-            <a:pPr indent="0" marL="0">
+            <a:pPr marL="0" indent="0">
               <a:buNone/>
             </a:pPr>
             <a:r>
@@ -4401,7 +4186,7 @@
           <a:bodyPr wrap="square" rtlCol="0" anchor="ctr"/>
           <a:lstStyle/>
           <a:p>
-            <a:pPr indent="0" marL="0">
+            <a:pPr marL="0" indent="0">
               <a:buNone/>
             </a:pPr>
             <a:r>
@@ -4415,7 +4200,7 @@
             <a:endParaRPr lang="en-US" sz="1100" dirty="0"/>
           </a:p>
           <a:p>
-            <a:pPr indent="0" marL="0">
+            <a:pPr marL="0" indent="0">
               <a:buNone/>
             </a:pPr>
             <a:r>
@@ -4429,7 +4214,7 @@
             <a:endParaRPr lang="en-US" sz="1100" dirty="0"/>
           </a:p>
           <a:p>
-            <a:pPr indent="0" marL="0">
+            <a:pPr marL="0" indent="0">
               <a:buNone/>
             </a:pPr>
             <a:r>
@@ -4443,7 +4228,7 @@
             <a:endParaRPr lang="en-US" sz="1100" dirty="0"/>
           </a:p>
           <a:p>
-            <a:pPr indent="0" marL="0">
+            <a:pPr marL="0" indent="0">
               <a:buNone/>
             </a:pPr>
             <a:r>
@@ -4457,7 +4242,7 @@
             <a:endParaRPr lang="en-US" sz="1100" dirty="0"/>
           </a:p>
           <a:p>
-            <a:pPr indent="0" marL="0">
+            <a:pPr marL="0" indent="0">
               <a:buNone/>
             </a:pPr>
             <a:r>
@@ -4493,7 +4278,7 @@
           <a:bodyPr wrap="square" rtlCol="0" anchor="ctr"/>
           <a:lstStyle/>
           <a:p>
-            <a:pPr algn="r" indent="0" marL="0">
+            <a:pPr marL="0" indent="0" algn="r">
               <a:buNone/>
             </a:pPr>
             <a:r>
@@ -4554,7 +4339,7 @@
           <a:bodyPr wrap="square" rtlCol="0" anchor="ctr"/>
           <a:lstStyle/>
           <a:p>
-            <a:pPr indent="0" marL="0">
+            <a:pPr marL="0" indent="0">
               <a:buNone/>
             </a:pPr>
             <a:r>
@@ -4590,7 +4375,7 @@
           <a:bodyPr wrap="square" rtlCol="0" anchor="ctr"/>
           <a:lstStyle/>
           <a:p>
-            <a:pPr indent="0" marL="0">
+            <a:pPr marL="0" indent="0">
               <a:buNone/>
             </a:pPr>
             <a:r>
@@ -4621,16 +4406,34 @@
         </p:nvGraphicFramePr>
         <p:xfrm>
           <a:off x="457200" y="1371600"/>
-          <a:ext cx="4023360" cy="1280160"/>
+          <a:ext cx="4023360" cy="1417320"/>
         </p:xfrm>
         <a:graphic>
           <a:graphicData uri="http://schemas.openxmlformats.org/drawingml/2006/table">
             <a:tbl>
               <a:tblPr/>
               <a:tblGrid>
-                <a:gridCol w="1341120"/>
-                <a:gridCol w="1341120"/>
-                <a:gridCol w="1341120"/>
+                <a:gridCol w="1341120">
+                  <a:extLst>
+                    <a:ext uri="{9D8B030D-6E8A-4147-A177-3AD203B41FA5}">
+                      <a16:colId xmlns:a16="http://schemas.microsoft.com/office/drawing/2014/main" val="20000"/>
+                    </a:ext>
+                  </a:extLst>
+                </a:gridCol>
+                <a:gridCol w="1341120">
+                  <a:extLst>
+                    <a:ext uri="{9D8B030D-6E8A-4147-A177-3AD203B41FA5}">
+                      <a16:colId xmlns:a16="http://schemas.microsoft.com/office/drawing/2014/main" val="20001"/>
+                    </a:ext>
+                  </a:extLst>
+                </a:gridCol>
+                <a:gridCol w="1341120">
+                  <a:extLst>
+                    <a:ext uri="{9D8B030D-6E8A-4147-A177-3AD203B41FA5}">
+                      <a16:colId xmlns:a16="http://schemas.microsoft.com/office/drawing/2014/main" val="20002"/>
+                    </a:ext>
+                  </a:extLst>
+                </a:gridCol>
               </a:tblGrid>
               <a:tr h="320040">
                 <a:tc>
@@ -4638,7 +4441,7 @@
                     <a:bodyPr/>
                     <a:lstStyle/>
                     <a:p>
-                      <a:pPr algn="l" indent="0" marL="0">
+                      <a:pPr marL="0" indent="0" algn="l">
                         <a:buNone/>
                       </a:pPr>
                       <a:r>
@@ -4652,7 +4455,7 @@
                       <a:endParaRPr lang="en-US" sz="1200" dirty="0"/>
                     </a:p>
                   </a:txBody>
-                  <a:tcPr marL="91440" marR="91440" marT="45720" marB="45720" anchor="ctr">
+                  <a:tcPr anchor="ctr">
                     <a:lnL w="12700" cap="flat" cmpd="sng" algn="ctr">
                       <a:solidFill>
                         <a:srgbClr val="CCCCCC"/>
@@ -4699,7 +4502,7 @@
                     <a:bodyPr/>
                     <a:lstStyle/>
                     <a:p>
-                      <a:pPr algn="l" indent="0" marL="0">
+                      <a:pPr marL="0" indent="0" algn="l">
                         <a:buNone/>
                       </a:pPr>
                       <a:r>
@@ -4713,7 +4516,7 @@
                       <a:endParaRPr lang="en-US" sz="1200" dirty="0"/>
                     </a:p>
                   </a:txBody>
-                  <a:tcPr marL="91440" marR="91440" marT="45720" marB="45720" anchor="ctr">
+                  <a:tcPr anchor="ctr">
                     <a:lnL w="12700" cap="flat" cmpd="sng" algn="ctr">
                       <a:solidFill>
                         <a:srgbClr val="CCCCCC"/>
@@ -4760,7 +4563,7 @@
                     <a:bodyPr/>
                     <a:lstStyle/>
                     <a:p>
-                      <a:pPr algn="l" indent="0" marL="0">
+                      <a:pPr marL="0" indent="0" algn="l">
                         <a:buNone/>
                       </a:pPr>
                       <a:r>
@@ -4774,7 +4577,7 @@
                       <a:endParaRPr lang="en-US" sz="1200" dirty="0"/>
                     </a:p>
                   </a:txBody>
-                  <a:tcPr marL="91440" marR="91440" marT="45720" marB="45720" anchor="ctr">
+                  <a:tcPr anchor="ctr">
                     <a:lnL w="12700" cap="flat" cmpd="sng" algn="ctr">
                       <a:solidFill>
                         <a:srgbClr val="CCCCCC"/>
@@ -4816,6 +4619,11 @@
                     </a:solidFill>
                   </a:tcPr>
                 </a:tc>
+                <a:extLst>
+                  <a:ext uri="{0D108BD9-81ED-4DB2-BD59-A6C34878D82A}">
+                    <a16:rowId xmlns:a16="http://schemas.microsoft.com/office/drawing/2014/main" val="10000"/>
+                  </a:ext>
+                </a:extLst>
               </a:tr>
               <a:tr h="320040">
                 <a:tc>
@@ -4823,7 +4631,7 @@
                     <a:bodyPr/>
                     <a:lstStyle/>
                     <a:p>
-                      <a:pPr algn="l" indent="0" marL="0">
+                      <a:pPr marL="0" indent="0" algn="l">
                         <a:buNone/>
                       </a:pPr>
                       <a:r>
@@ -4837,7 +4645,7 @@
                       <a:endParaRPr lang="en-US" sz="1200" dirty="0"/>
                     </a:p>
                   </a:txBody>
-                  <a:tcPr marL="91440" marR="91440" marT="45720" marB="45720" anchor="ctr">
+                  <a:tcPr anchor="ctr">
                     <a:lnL w="12700" cap="flat" cmpd="sng" algn="ctr">
                       <a:solidFill>
                         <a:srgbClr val="CCCCCC"/>
@@ -4884,7 +4692,7 @@
                     <a:bodyPr/>
                     <a:lstStyle/>
                     <a:p>
-                      <a:pPr algn="l" indent="0" marL="0">
+                      <a:pPr marL="0" indent="0" algn="l">
                         <a:buNone/>
                       </a:pPr>
                       <a:r>
@@ -4898,7 +4706,7 @@
                       <a:endParaRPr lang="en-US" sz="1200" dirty="0"/>
                     </a:p>
                   </a:txBody>
-                  <a:tcPr marL="91440" marR="91440" marT="45720" marB="45720" anchor="ctr">
+                  <a:tcPr anchor="ctr">
                     <a:lnL w="12700" cap="flat" cmpd="sng" algn="ctr">
                       <a:solidFill>
                         <a:srgbClr val="CCCCCC"/>
@@ -4945,7 +4753,7 @@
                     <a:bodyPr/>
                     <a:lstStyle/>
                     <a:p>
-                      <a:pPr algn="l" indent="0" marL="0">
+                      <a:pPr marL="0" indent="0" algn="l">
                         <a:buNone/>
                       </a:pPr>
                       <a:r>
@@ -4959,7 +4767,7 @@
                       <a:endParaRPr lang="en-US" sz="1200" dirty="0"/>
                     </a:p>
                   </a:txBody>
-                  <a:tcPr marL="91440" marR="91440" marT="45720" marB="45720" anchor="ctr">
+                  <a:tcPr anchor="ctr">
                     <a:lnL w="12700" cap="flat" cmpd="sng" algn="ctr">
                       <a:solidFill>
                         <a:srgbClr val="CCCCCC"/>
@@ -5001,6 +4809,11 @@
                     </a:solidFill>
                   </a:tcPr>
                 </a:tc>
+                <a:extLst>
+                  <a:ext uri="{0D108BD9-81ED-4DB2-BD59-A6C34878D82A}">
+                    <a16:rowId xmlns:a16="http://schemas.microsoft.com/office/drawing/2014/main" val="10001"/>
+                  </a:ext>
+                </a:extLst>
               </a:tr>
               <a:tr h="320040">
                 <a:tc>
@@ -5008,7 +4821,7 @@
                     <a:bodyPr/>
                     <a:lstStyle/>
                     <a:p>
-                      <a:pPr algn="l" indent="0" marL="0">
+                      <a:pPr marL="0" indent="0" algn="l">
                         <a:buNone/>
                       </a:pPr>
                       <a:r>
@@ -5022,7 +4835,7 @@
                       <a:endParaRPr lang="en-US" sz="1200" dirty="0"/>
                     </a:p>
                   </a:txBody>
-                  <a:tcPr marL="91440" marR="91440" marT="45720" marB="45720" anchor="ctr">
+                  <a:tcPr anchor="ctr">
                     <a:lnL w="12700" cap="flat" cmpd="sng" algn="ctr">
                       <a:solidFill>
                         <a:srgbClr val="CCCCCC"/>
@@ -5069,7 +4882,7 @@
                     <a:bodyPr/>
                     <a:lstStyle/>
                     <a:p>
-                      <a:pPr algn="l" indent="0" marL="0">
+                      <a:pPr marL="0" indent="0" algn="l">
                         <a:buNone/>
                       </a:pPr>
                       <a:r>
@@ -5083,7 +4896,7 @@
                       <a:endParaRPr lang="en-US" sz="1200" dirty="0"/>
                     </a:p>
                   </a:txBody>
-                  <a:tcPr marL="91440" marR="91440" marT="45720" marB="45720" anchor="ctr">
+                  <a:tcPr anchor="ctr">
                     <a:lnL w="12700" cap="flat" cmpd="sng" algn="ctr">
                       <a:solidFill>
                         <a:srgbClr val="CCCCCC"/>
@@ -5130,7 +4943,7 @@
                     <a:bodyPr/>
                     <a:lstStyle/>
                     <a:p>
-                      <a:pPr algn="l" indent="0" marL="0">
+                      <a:pPr marL="0" indent="0" algn="l">
                         <a:buNone/>
                       </a:pPr>
                       <a:r>
@@ -5144,7 +4957,7 @@
                       <a:endParaRPr lang="en-US" sz="1200" dirty="0"/>
                     </a:p>
                   </a:txBody>
-                  <a:tcPr marL="91440" marR="91440" marT="45720" marB="45720" anchor="ctr">
+                  <a:tcPr anchor="ctr">
                     <a:lnL w="12700" cap="flat" cmpd="sng" algn="ctr">
                       <a:solidFill>
                         <a:srgbClr val="CCCCCC"/>
@@ -5186,6 +4999,11 @@
                     </a:solidFill>
                   </a:tcPr>
                 </a:tc>
+                <a:extLst>
+                  <a:ext uri="{0D108BD9-81ED-4DB2-BD59-A6C34878D82A}">
+                    <a16:rowId xmlns:a16="http://schemas.microsoft.com/office/drawing/2014/main" val="10002"/>
+                  </a:ext>
+                </a:extLst>
               </a:tr>
               <a:tr h="320040">
                 <a:tc>
@@ -5193,7 +5011,7 @@
                     <a:bodyPr/>
                     <a:lstStyle/>
                     <a:p>
-                      <a:pPr algn="l" indent="0" marL="0">
+                      <a:pPr marL="0" indent="0" algn="l">
                         <a:buNone/>
                       </a:pPr>
                       <a:r>
@@ -5207,7 +5025,7 @@
                       <a:endParaRPr lang="en-US" sz="1200" dirty="0"/>
                     </a:p>
                   </a:txBody>
-                  <a:tcPr marL="91440" marR="91440" marT="45720" marB="45720" anchor="ctr">
+                  <a:tcPr anchor="ctr">
                     <a:lnL w="12700" cap="flat" cmpd="sng" algn="ctr">
                       <a:solidFill>
                         <a:srgbClr val="CCCCCC"/>
@@ -5254,7 +5072,7 @@
                     <a:bodyPr/>
                     <a:lstStyle/>
                     <a:p>
-                      <a:pPr algn="l" indent="0" marL="0">
+                      <a:pPr marL="0" indent="0" algn="l">
                         <a:buNone/>
                       </a:pPr>
                       <a:r>
@@ -5268,7 +5086,7 @@
                       <a:endParaRPr lang="en-US" sz="1200" dirty="0"/>
                     </a:p>
                   </a:txBody>
-                  <a:tcPr marL="91440" marR="91440" marT="45720" marB="45720" anchor="ctr">
+                  <a:tcPr anchor="ctr">
                     <a:lnL w="12700" cap="flat" cmpd="sng" algn="ctr">
                       <a:solidFill>
                         <a:srgbClr val="CCCCCC"/>
@@ -5315,7 +5133,7 @@
                     <a:bodyPr/>
                     <a:lstStyle/>
                     <a:p>
-                      <a:pPr algn="l" indent="0" marL="0">
+                      <a:pPr marL="0" indent="0" algn="l">
                         <a:buNone/>
                       </a:pPr>
                       <a:r>
@@ -5329,7 +5147,7 @@
                       <a:endParaRPr lang="en-US" sz="1200" dirty="0"/>
                     </a:p>
                   </a:txBody>
-                  <a:tcPr marL="91440" marR="91440" marT="45720" marB="45720" anchor="ctr">
+                  <a:tcPr anchor="ctr">
                     <a:lnL w="12700" cap="flat" cmpd="sng" algn="ctr">
                       <a:solidFill>
                         <a:srgbClr val="CCCCCC"/>
@@ -5371,6 +5189,11 @@
                     </a:solidFill>
                   </a:tcPr>
                 </a:tc>
+                <a:extLst>
+                  <a:ext uri="{0D108BD9-81ED-4DB2-BD59-A6C34878D82A}">
+                    <a16:rowId xmlns:a16="http://schemas.microsoft.com/office/drawing/2014/main" val="10003"/>
+                  </a:ext>
+                </a:extLst>
               </a:tr>
             </a:tbl>
           </a:graphicData>
@@ -5397,7 +5220,7 @@
           <a:bodyPr wrap="square" rtlCol="0" anchor="ctr"/>
           <a:lstStyle/>
           <a:p>
-            <a:pPr indent="0" marL="0">
+            <a:pPr marL="0" indent="0">
               <a:buNone/>
             </a:pPr>
             <a:r>
@@ -5428,16 +5251,34 @@
         </p:nvGraphicFramePr>
         <p:xfrm>
           <a:off x="4663440" y="1371600"/>
-          <a:ext cx="4023360" cy="1280160"/>
+          <a:ext cx="4023360" cy="1554480"/>
         </p:xfrm>
         <a:graphic>
           <a:graphicData uri="http://schemas.openxmlformats.org/drawingml/2006/table">
             <a:tbl>
               <a:tblPr/>
               <a:tblGrid>
-                <a:gridCol w="1341120"/>
-                <a:gridCol w="1341120"/>
-                <a:gridCol w="1341120"/>
+                <a:gridCol w="1341120">
+                  <a:extLst>
+                    <a:ext uri="{9D8B030D-6E8A-4147-A177-3AD203B41FA5}">
+                      <a16:colId xmlns:a16="http://schemas.microsoft.com/office/drawing/2014/main" val="20000"/>
+                    </a:ext>
+                  </a:extLst>
+                </a:gridCol>
+                <a:gridCol w="1341120">
+                  <a:extLst>
+                    <a:ext uri="{9D8B030D-6E8A-4147-A177-3AD203B41FA5}">
+                      <a16:colId xmlns:a16="http://schemas.microsoft.com/office/drawing/2014/main" val="20001"/>
+                    </a:ext>
+                  </a:extLst>
+                </a:gridCol>
+                <a:gridCol w="1341120">
+                  <a:extLst>
+                    <a:ext uri="{9D8B030D-6E8A-4147-A177-3AD203B41FA5}">
+                      <a16:colId xmlns:a16="http://schemas.microsoft.com/office/drawing/2014/main" val="20002"/>
+                    </a:ext>
+                  </a:extLst>
+                </a:gridCol>
               </a:tblGrid>
               <a:tr h="320040">
                 <a:tc>
@@ -5445,7 +5286,7 @@
                     <a:bodyPr/>
                     <a:lstStyle/>
                     <a:p>
-                      <a:pPr algn="l" indent="0" marL="0">
+                      <a:pPr marL="0" indent="0" algn="l">
                         <a:buNone/>
                       </a:pPr>
                       <a:r>
@@ -5459,7 +5300,7 @@
                       <a:endParaRPr lang="en-US" sz="1200" dirty="0"/>
                     </a:p>
                   </a:txBody>
-                  <a:tcPr marL="91440" marR="91440" marT="45720" marB="45720" anchor="ctr">
+                  <a:tcPr anchor="ctr">
                     <a:lnL w="12700" cap="flat" cmpd="sng" algn="ctr">
                       <a:solidFill>
                         <a:srgbClr val="CCCCCC"/>
@@ -5506,7 +5347,7 @@
                     <a:bodyPr/>
                     <a:lstStyle/>
                     <a:p>
-                      <a:pPr algn="l" indent="0" marL="0">
+                      <a:pPr marL="0" indent="0" algn="l">
                         <a:buNone/>
                       </a:pPr>
                       <a:r>
@@ -5520,7 +5361,7 @@
                       <a:endParaRPr lang="en-US" sz="1200" dirty="0"/>
                     </a:p>
                   </a:txBody>
-                  <a:tcPr marL="91440" marR="91440" marT="45720" marB="45720" anchor="ctr">
+                  <a:tcPr anchor="ctr">
                     <a:lnL w="12700" cap="flat" cmpd="sng" algn="ctr">
                       <a:solidFill>
                         <a:srgbClr val="CCCCCC"/>
@@ -5567,7 +5408,7 @@
                     <a:bodyPr/>
                     <a:lstStyle/>
                     <a:p>
-                      <a:pPr algn="l" indent="0" marL="0">
+                      <a:pPr marL="0" indent="0" algn="l">
                         <a:buNone/>
                       </a:pPr>
                       <a:r>
@@ -5581,7 +5422,7 @@
                       <a:endParaRPr lang="en-US" sz="1200" dirty="0"/>
                     </a:p>
                   </a:txBody>
-                  <a:tcPr marL="91440" marR="91440" marT="45720" marB="45720" anchor="ctr">
+                  <a:tcPr anchor="ctr">
                     <a:lnL w="12700" cap="flat" cmpd="sng" algn="ctr">
                       <a:solidFill>
                         <a:srgbClr val="CCCCCC"/>
@@ -5623,6 +5464,11 @@
                     </a:solidFill>
                   </a:tcPr>
                 </a:tc>
+                <a:extLst>
+                  <a:ext uri="{0D108BD9-81ED-4DB2-BD59-A6C34878D82A}">
+                    <a16:rowId xmlns:a16="http://schemas.microsoft.com/office/drawing/2014/main" val="10000"/>
+                  </a:ext>
+                </a:extLst>
               </a:tr>
               <a:tr h="320040">
                 <a:tc>
@@ -5630,7 +5476,7 @@
                     <a:bodyPr/>
                     <a:lstStyle/>
                     <a:p>
-                      <a:pPr algn="l" indent="0" marL="0">
+                      <a:pPr marL="0" indent="0" algn="l">
                         <a:buNone/>
                       </a:pPr>
                       <a:r>
@@ -5644,7 +5490,7 @@
                       <a:endParaRPr lang="en-US" sz="1200" dirty="0"/>
                     </a:p>
                   </a:txBody>
-                  <a:tcPr marL="91440" marR="91440" marT="45720" marB="45720" anchor="ctr">
+                  <a:tcPr anchor="ctr">
                     <a:lnL w="12700" cap="flat" cmpd="sng" algn="ctr">
                       <a:solidFill>
                         <a:srgbClr val="CCCCCC"/>
@@ -5691,7 +5537,7 @@
                     <a:bodyPr/>
                     <a:lstStyle/>
                     <a:p>
-                      <a:pPr algn="l" indent="0" marL="0">
+                      <a:pPr marL="0" indent="0" algn="l">
                         <a:buNone/>
                       </a:pPr>
                       <a:r>
@@ -5705,7 +5551,7 @@
                       <a:endParaRPr lang="en-US" sz="1200" dirty="0"/>
                     </a:p>
                   </a:txBody>
-                  <a:tcPr marL="91440" marR="91440" marT="45720" marB="45720" anchor="ctr">
+                  <a:tcPr anchor="ctr">
                     <a:lnL w="12700" cap="flat" cmpd="sng" algn="ctr">
                       <a:solidFill>
                         <a:srgbClr val="CCCCCC"/>
@@ -5752,7 +5598,7 @@
                     <a:bodyPr/>
                     <a:lstStyle/>
                     <a:p>
-                      <a:pPr algn="l" indent="0" marL="0">
+                      <a:pPr marL="0" indent="0" algn="l">
                         <a:buNone/>
                       </a:pPr>
                       <a:r>
@@ -5766,7 +5612,7 @@
                       <a:endParaRPr lang="en-US" sz="1200" dirty="0"/>
                     </a:p>
                   </a:txBody>
-                  <a:tcPr marL="91440" marR="91440" marT="45720" marB="45720" anchor="ctr">
+                  <a:tcPr anchor="ctr">
                     <a:lnL w="12700" cap="flat" cmpd="sng" algn="ctr">
                       <a:solidFill>
                         <a:srgbClr val="CCCCCC"/>
@@ -5808,6 +5654,11 @@
                     </a:solidFill>
                   </a:tcPr>
                 </a:tc>
+                <a:extLst>
+                  <a:ext uri="{0D108BD9-81ED-4DB2-BD59-A6C34878D82A}">
+                    <a16:rowId xmlns:a16="http://schemas.microsoft.com/office/drawing/2014/main" val="10001"/>
+                  </a:ext>
+                </a:extLst>
               </a:tr>
               <a:tr h="320040">
                 <a:tc>
@@ -5815,7 +5666,7 @@
                     <a:bodyPr/>
                     <a:lstStyle/>
                     <a:p>
-                      <a:pPr algn="l" indent="0" marL="0">
+                      <a:pPr marL="0" indent="0" algn="l">
                         <a:buNone/>
                       </a:pPr>
                       <a:r>
@@ -5829,7 +5680,7 @@
                       <a:endParaRPr lang="en-US" sz="1200" dirty="0"/>
                     </a:p>
                   </a:txBody>
-                  <a:tcPr marL="91440" marR="91440" marT="45720" marB="45720" anchor="ctr">
+                  <a:tcPr anchor="ctr">
                     <a:lnL w="12700" cap="flat" cmpd="sng" algn="ctr">
                       <a:solidFill>
                         <a:srgbClr val="CCCCCC"/>
@@ -5876,7 +5727,7 @@
                     <a:bodyPr/>
                     <a:lstStyle/>
                     <a:p>
-                      <a:pPr algn="l" indent="0" marL="0">
+                      <a:pPr marL="0" indent="0" algn="l">
                         <a:buNone/>
                       </a:pPr>
                       <a:r>
@@ -5890,7 +5741,7 @@
                       <a:endParaRPr lang="en-US" sz="1200" dirty="0"/>
                     </a:p>
                   </a:txBody>
-                  <a:tcPr marL="91440" marR="91440" marT="45720" marB="45720" anchor="ctr">
+                  <a:tcPr anchor="ctr">
                     <a:lnL w="12700" cap="flat" cmpd="sng" algn="ctr">
                       <a:solidFill>
                         <a:srgbClr val="CCCCCC"/>
@@ -5937,7 +5788,7 @@
                     <a:bodyPr/>
                     <a:lstStyle/>
                     <a:p>
-                      <a:pPr algn="l" indent="0" marL="0">
+                      <a:pPr marL="0" indent="0" algn="l">
                         <a:buNone/>
                       </a:pPr>
                       <a:r>
@@ -5951,7 +5802,7 @@
                       <a:endParaRPr lang="en-US" sz="1200" dirty="0"/>
                     </a:p>
                   </a:txBody>
-                  <a:tcPr marL="91440" marR="91440" marT="45720" marB="45720" anchor="ctr">
+                  <a:tcPr anchor="ctr">
                     <a:lnL w="12700" cap="flat" cmpd="sng" algn="ctr">
                       <a:solidFill>
                         <a:srgbClr val="CCCCCC"/>
@@ -5993,6 +5844,11 @@
                     </a:solidFill>
                   </a:tcPr>
                 </a:tc>
+                <a:extLst>
+                  <a:ext uri="{0D108BD9-81ED-4DB2-BD59-A6C34878D82A}">
+                    <a16:rowId xmlns:a16="http://schemas.microsoft.com/office/drawing/2014/main" val="10002"/>
+                  </a:ext>
+                </a:extLst>
               </a:tr>
               <a:tr h="320040">
                 <a:tc>
@@ -6000,7 +5856,7 @@
                     <a:bodyPr/>
                     <a:lstStyle/>
                     <a:p>
-                      <a:pPr algn="l" indent="0" marL="0">
+                      <a:pPr marL="0" indent="0" algn="l">
                         <a:buNone/>
                       </a:pPr>
                       <a:r>
@@ -6014,7 +5870,7 @@
                       <a:endParaRPr lang="en-US" sz="1200" dirty="0"/>
                     </a:p>
                   </a:txBody>
-                  <a:tcPr marL="91440" marR="91440" marT="45720" marB="45720" anchor="ctr">
+                  <a:tcPr anchor="ctr">
                     <a:lnL w="12700" cap="flat" cmpd="sng" algn="ctr">
                       <a:solidFill>
                         <a:srgbClr val="CCCCCC"/>
@@ -6061,7 +5917,7 @@
                     <a:bodyPr/>
                     <a:lstStyle/>
                     <a:p>
-                      <a:pPr algn="l" indent="0" marL="0">
+                      <a:pPr marL="0" indent="0" algn="l">
                         <a:buNone/>
                       </a:pPr>
                       <a:r>
@@ -6075,7 +5931,7 @@
                       <a:endParaRPr lang="en-US" sz="1200" dirty="0"/>
                     </a:p>
                   </a:txBody>
-                  <a:tcPr marL="91440" marR="91440" marT="45720" marB="45720" anchor="ctr">
+                  <a:tcPr anchor="ctr">
                     <a:lnL w="12700" cap="flat" cmpd="sng" algn="ctr">
                       <a:solidFill>
                         <a:srgbClr val="CCCCCC"/>
@@ -6122,7 +5978,7 @@
                     <a:bodyPr/>
                     <a:lstStyle/>
                     <a:p>
-                      <a:pPr algn="l" indent="0" marL="0">
+                      <a:pPr marL="0" indent="0" algn="l">
                         <a:buNone/>
                       </a:pPr>
                       <a:r>
@@ -6136,7 +5992,7 @@
                       <a:endParaRPr lang="en-US" sz="1200" dirty="0"/>
                     </a:p>
                   </a:txBody>
-                  <a:tcPr marL="91440" marR="91440" marT="45720" marB="45720" anchor="ctr">
+                  <a:tcPr anchor="ctr">
                     <a:lnL w="12700" cap="flat" cmpd="sng" algn="ctr">
                       <a:solidFill>
                         <a:srgbClr val="CCCCCC"/>
@@ -6178,6 +6034,11 @@
                     </a:solidFill>
                   </a:tcPr>
                 </a:tc>
+                <a:extLst>
+                  <a:ext uri="{0D108BD9-81ED-4DB2-BD59-A6C34878D82A}">
+                    <a16:rowId xmlns:a16="http://schemas.microsoft.com/office/drawing/2014/main" val="10003"/>
+                  </a:ext>
+                </a:extLst>
               </a:tr>
             </a:tbl>
           </a:graphicData>
@@ -6224,7 +6085,7 @@
           <a:bodyPr wrap="square" rtlCol="0" anchor="ctr"/>
           <a:lstStyle/>
           <a:p>
-            <a:pPr indent="0" marL="0">
+            <a:pPr marL="0" indent="0">
               <a:buNone/>
             </a:pPr>
             <a:r>
@@ -6260,7 +6121,7 @@
           <a:bodyPr wrap="square" rtlCol="0" anchor="ctr"/>
           <a:lstStyle/>
           <a:p>
-            <a:pPr indent="0" marL="0">
+            <a:pPr marL="0" indent="0">
               <a:buNone/>
             </a:pPr>
             <a:r>
@@ -6274,7 +6135,7 @@
             <a:endParaRPr lang="en-US" sz="1200" dirty="0"/>
           </a:p>
           <a:p>
-            <a:pPr indent="0" marL="0">
+            <a:pPr marL="0" indent="0">
               <a:buNone/>
             </a:pPr>
             <a:r>
@@ -6288,7 +6149,7 @@
             <a:endParaRPr lang="en-US" sz="1200" dirty="0"/>
           </a:p>
           <a:p>
-            <a:pPr indent="0" marL="0">
+            <a:pPr marL="0" indent="0">
               <a:buNone/>
             </a:pPr>
             <a:r>
@@ -6302,7 +6163,7 @@
             <a:endParaRPr lang="en-US" sz="1200" dirty="0"/>
           </a:p>
           <a:p>
-            <a:pPr indent="0" marL="0">
+            <a:pPr marL="0" indent="0">
               <a:buNone/>
             </a:pPr>
             <a:r>
@@ -6338,7 +6199,7 @@
           <a:bodyPr wrap="square" rtlCol="0" anchor="ctr"/>
           <a:lstStyle/>
           <a:p>
-            <a:pPr algn="r" indent="0" marL="0">
+            <a:pPr marL="0" indent="0" algn="r">
               <a:buNone/>
             </a:pPr>
             <a:r>
@@ -6399,7 +6260,7 @@
           <a:bodyPr wrap="square" rtlCol="0" anchor="ctr"/>
           <a:lstStyle/>
           <a:p>
-            <a:pPr indent="0" marL="0">
+            <a:pPr marL="0" indent="0">
               <a:buNone/>
             </a:pPr>
             <a:r>
@@ -6455,7 +6316,7 @@
           <a:bodyPr wrap="square" rtlCol="0" anchor="ctr"/>
           <a:lstStyle/>
           <a:p>
-            <a:pPr indent="0" marL="0">
+            <a:pPr marL="0" indent="0">
               <a:buNone/>
             </a:pPr>
             <a:r>
@@ -6491,7 +6352,7 @@
           <a:bodyPr wrap="square" rtlCol="0" anchor="ctr"/>
           <a:lstStyle/>
           <a:p>
-            <a:pPr indent="0" marL="0">
+            <a:pPr marL="0" indent="0">
               <a:buNone/>
             </a:pPr>
             <a:r>
@@ -6505,7 +6366,7 @@
             <a:endParaRPr lang="en-US" sz="1200" dirty="0"/>
           </a:p>
           <a:p>
-            <a:pPr indent="0" marL="0">
+            <a:pPr marL="0" indent="0">
               <a:buNone/>
             </a:pPr>
             <a:r>
@@ -6519,7 +6380,7 @@
             <a:endParaRPr lang="en-US" sz="1200" dirty="0"/>
           </a:p>
           <a:p>
-            <a:pPr indent="0" marL="0">
+            <a:pPr marL="0" indent="0">
               <a:buNone/>
             </a:pPr>
             <a:r>
@@ -6533,7 +6394,7 @@
             <a:endParaRPr lang="en-US" sz="1200" dirty="0"/>
           </a:p>
           <a:p>
-            <a:pPr indent="0" marL="0">
+            <a:pPr marL="0" indent="0">
               <a:buNone/>
             </a:pPr>
             <a:r>
@@ -6547,7 +6408,7 @@
             <a:endParaRPr lang="en-US" sz="1200" dirty="0"/>
           </a:p>
           <a:p>
-            <a:pPr indent="0" marL="0">
+            <a:pPr marL="0" indent="0">
               <a:buNone/>
             </a:pPr>
             <a:r>
@@ -6603,7 +6464,7 @@
           <a:bodyPr wrap="square" rtlCol="0" anchor="ctr"/>
           <a:lstStyle/>
           <a:p>
-            <a:pPr indent="0" marL="0">
+            <a:pPr marL="0" indent="0">
               <a:buNone/>
             </a:pPr>
             <a:r>
@@ -6639,7 +6500,7 @@
           <a:bodyPr wrap="square" rtlCol="0" anchor="ctr"/>
           <a:lstStyle/>
           <a:p>
-            <a:pPr indent="0" marL="0">
+            <a:pPr marL="0" indent="0">
               <a:buNone/>
             </a:pPr>
             <a:r>
@@ -6653,7 +6514,7 @@
             <a:endParaRPr lang="en-US" sz="1200" dirty="0"/>
           </a:p>
           <a:p>
-            <a:pPr indent="0" marL="0">
+            <a:pPr marL="0" indent="0">
               <a:buNone/>
             </a:pPr>
             <a:r>
@@ -6667,7 +6528,7 @@
             <a:endParaRPr lang="en-US" sz="1200" dirty="0"/>
           </a:p>
           <a:p>
-            <a:pPr indent="0" marL="0">
+            <a:pPr marL="0" indent="0">
               <a:buNone/>
             </a:pPr>
             <a:r>
@@ -6681,7 +6542,7 @@
             <a:endParaRPr lang="en-US" sz="1200" dirty="0"/>
           </a:p>
           <a:p>
-            <a:pPr indent="0" marL="0">
+            <a:pPr marL="0" indent="0">
               <a:buNone/>
             </a:pPr>
             <a:r>
@@ -6695,7 +6556,7 @@
             <a:endParaRPr lang="en-US" sz="1200" dirty="0"/>
           </a:p>
           <a:p>
-            <a:pPr indent="0" marL="0">
+            <a:pPr marL="0" indent="0">
               <a:buNone/>
             </a:pPr>
             <a:r>
@@ -6751,7 +6612,7 @@
           <a:bodyPr wrap="square" rtlCol="0" anchor="ctr"/>
           <a:lstStyle/>
           <a:p>
-            <a:pPr indent="0" marL="0">
+            <a:pPr marL="0" indent="0">
               <a:buNone/>
             </a:pPr>
             <a:r>
@@ -6787,7 +6648,7 @@
           <a:bodyPr wrap="square" rtlCol="0" anchor="ctr"/>
           <a:lstStyle/>
           <a:p>
-            <a:pPr indent="0" marL="0">
+            <a:pPr marL="0" indent="0">
               <a:buNone/>
             </a:pPr>
             <a:r>
@@ -6801,7 +6662,7 @@
             <a:endParaRPr lang="en-US" sz="1100" dirty="0"/>
           </a:p>
           <a:p>
-            <a:pPr indent="0" marL="0">
+            <a:pPr marL="0" indent="0">
               <a:buNone/>
             </a:pPr>
             <a:r>
@@ -6815,13 +6676,13 @@
             <a:endParaRPr lang="en-US" sz="1100" dirty="0"/>
           </a:p>
           <a:p>
-            <a:pPr indent="0" marL="0">
+            <a:pPr marL="0" indent="0">
               <a:buNone/>
             </a:pPr>
             <a:endParaRPr lang="en-US" sz="1100" dirty="0"/>
           </a:p>
           <a:p>
-            <a:pPr indent="0" marL="0">
+            <a:pPr marL="0" indent="0">
               <a:buNone/>
             </a:pPr>
             <a:r>
@@ -6835,7 +6696,7 @@
             <a:endParaRPr lang="en-US" sz="1100" dirty="0"/>
           </a:p>
           <a:p>
-            <a:pPr indent="0" marL="0">
+            <a:pPr marL="0" indent="0">
               <a:buNone/>
             </a:pPr>
             <a:r>
@@ -6871,7 +6732,7 @@
           <a:bodyPr wrap="square" rtlCol="0" anchor="ctr"/>
           <a:lstStyle/>
           <a:p>
-            <a:pPr algn="r" indent="0" marL="0">
+            <a:pPr marL="0" indent="0" algn="r">
               <a:buNone/>
             </a:pPr>
             <a:r>
@@ -6932,7 +6793,7 @@
           <a:bodyPr wrap="square" rtlCol="0" anchor="ctr"/>
           <a:lstStyle/>
           <a:p>
-            <a:pPr indent="0" marL="0">
+            <a:pPr marL="0" indent="0">
               <a:buNone/>
             </a:pPr>
             <a:r>
@@ -6988,7 +6849,7 @@
           <a:bodyPr wrap="square" rtlCol="0" anchor="ctr"/>
           <a:lstStyle/>
           <a:p>
-            <a:pPr indent="0" marL="0">
+            <a:pPr marL="0" indent="0">
               <a:buNone/>
             </a:pPr>
             <a:r>
@@ -7024,7 +6885,7 @@
           <a:bodyPr wrap="square" rtlCol="0" anchor="ctr"/>
           <a:lstStyle/>
           <a:p>
-            <a:pPr indent="0" marL="0">
+            <a:pPr marL="0" indent="0">
               <a:buNone/>
             </a:pPr>
             <a:r>
@@ -7060,7 +6921,7 @@
           <a:bodyPr wrap="square" rtlCol="0" anchor="ctr"/>
           <a:lstStyle/>
           <a:p>
-            <a:pPr indent="0" marL="0">
+            <a:pPr marL="0" indent="0">
               <a:buNone/>
             </a:pPr>
             <a:r>
@@ -7096,7 +6957,7 @@
           <a:bodyPr wrap="square" rtlCol="0" anchor="ctr"/>
           <a:lstStyle/>
           <a:p>
-            <a:pPr indent="0" marL="0">
+            <a:pPr marL="0" indent="0">
               <a:buNone/>
             </a:pPr>
             <a:r>
@@ -7132,7 +6993,7 @@
           <a:bodyPr wrap="square" rtlCol="0" anchor="ctr"/>
           <a:lstStyle/>
           <a:p>
-            <a:pPr indent="0" marL="0">
+            <a:pPr marL="0" indent="0">
               <a:buNone/>
             </a:pPr>
             <a:r>
@@ -7146,7 +7007,7 @@
             <a:endParaRPr lang="en-US" sz="1100" dirty="0"/>
           </a:p>
           <a:p>
-            <a:pPr indent="0" marL="0">
+            <a:pPr marL="0" indent="0">
               <a:buNone/>
             </a:pPr>
             <a:r>
@@ -7182,7 +7043,7 @@
           <a:bodyPr wrap="square" rtlCol="0" anchor="ctr"/>
           <a:lstStyle/>
           <a:p>
-            <a:pPr indent="0" marL="0">
+            <a:pPr marL="0" indent="0">
               <a:buNone/>
             </a:pPr>
             <a:r>
@@ -7218,7 +7079,7 @@
           <a:bodyPr wrap="square" rtlCol="0" anchor="ctr"/>
           <a:lstStyle/>
           <a:p>
-            <a:pPr indent="0" marL="0">
+            <a:pPr marL="0" indent="0">
               <a:buNone/>
             </a:pPr>
             <a:r>
@@ -7235,7 +7096,7 @@
             <a:endParaRPr lang="en-US" sz="1100" dirty="0"/>
           </a:p>
           <a:p>
-            <a:pPr indent="0" marL="0">
+            <a:pPr marL="0" indent="0">
               <a:buNone/>
             </a:pPr>
             <a:r>
@@ -7294,7 +7155,7 @@
           <a:bodyPr wrap="square" rtlCol="0" anchor="ctr"/>
           <a:lstStyle/>
           <a:p>
-            <a:pPr indent="0" marL="0">
+            <a:pPr marL="0" indent="0">
               <a:buNone/>
             </a:pPr>
             <a:r>
@@ -7330,7 +7191,7 @@
           <a:bodyPr wrap="square" rtlCol="0" anchor="ctr"/>
           <a:lstStyle/>
           <a:p>
-            <a:pPr indent="0" marL="0">
+            <a:pPr marL="0" indent="0">
               <a:buNone/>
             </a:pPr>
             <a:r>
@@ -7366,7 +7227,7 @@
           <a:bodyPr wrap="square" rtlCol="0" anchor="ctr"/>
           <a:lstStyle/>
           <a:p>
-            <a:pPr indent="0" marL="0">
+            <a:pPr marL="0" indent="0">
               <a:buNone/>
             </a:pPr>
             <a:r>
@@ -7380,7 +7241,7 @@
             <a:endParaRPr lang="en-US" sz="1100" dirty="0"/>
           </a:p>
           <a:p>
-            <a:pPr indent="0" marL="0">
+            <a:pPr marL="0" indent="0">
               <a:buNone/>
             </a:pPr>
             <a:r>
@@ -7416,7 +7277,7 @@
           <a:bodyPr wrap="square" rtlCol="0" anchor="ctr"/>
           <a:lstStyle/>
           <a:p>
-            <a:pPr indent="0" marL="0">
+            <a:pPr marL="0" indent="0">
               <a:buNone/>
             </a:pPr>
             <a:r>
@@ -7452,7 +7313,7 @@
           <a:bodyPr wrap="square" rtlCol="0" anchor="ctr"/>
           <a:lstStyle/>
           <a:p>
-            <a:pPr indent="0" marL="0">
+            <a:pPr marL="0" indent="0">
               <a:buNone/>
             </a:pPr>
             <a:r>
@@ -7491,7 +7352,7 @@
           <a:bodyPr wrap="square" rtlCol="0" anchor="ctr"/>
           <a:lstStyle/>
           <a:p>
-            <a:pPr indent="0" marL="0">
+            <a:pPr marL="0" indent="0">
               <a:buNone/>
             </a:pPr>
             <a:r>
@@ -7527,7 +7388,7 @@
           <a:bodyPr wrap="square" rtlCol="0" anchor="ctr"/>
           <a:lstStyle/>
           <a:p>
-            <a:pPr indent="0" marL="0">
+            <a:pPr marL="0" indent="0">
               <a:buNone/>
             </a:pPr>
             <a:r>
@@ -7544,7 +7405,7 @@
             <a:endParaRPr lang="en-US" sz="1100" dirty="0"/>
           </a:p>
           <a:p>
-            <a:pPr indent="0" marL="0">
+            <a:pPr marL="0" indent="0">
               <a:buNone/>
             </a:pPr>
             <a:r>
@@ -7583,7 +7444,7 @@
           <a:bodyPr wrap="square" rtlCol="0" anchor="ctr"/>
           <a:lstStyle/>
           <a:p>
-            <a:pPr algn="r" indent="0" marL="0">
+            <a:pPr marL="0" indent="0" algn="r">
               <a:buNone/>
             </a:pPr>
             <a:r>
@@ -7614,6 +7475,7 @@
         <a:solidFill>
           <a:srgbClr val="065A82"/>
         </a:solidFill>
+        <a:effectLst/>
       </p:bgPr>
     </p:bg>
     <p:spTree>
@@ -7651,7 +7513,7 @@
           <a:bodyPr wrap="square" rtlCol="0" anchor="ctr"/>
           <a:lstStyle/>
           <a:p>
-            <a:pPr algn="ctr" indent="0" marL="0">
+            <a:pPr marL="0" indent="0" algn="ctr">
               <a:buNone/>
             </a:pPr>
             <a:r>
@@ -7687,7 +7549,7 @@
           <a:bodyPr wrap="square" rtlCol="0" anchor="ctr"/>
           <a:lstStyle/>
           <a:p>
-            <a:pPr indent="0" marL="0">
+            <a:pPr marL="0" indent="0">
               <a:buNone/>
             </a:pPr>
             <a:r>
@@ -7723,7 +7585,7 @@
           <a:bodyPr wrap="square" rtlCol="0" anchor="ctr"/>
           <a:lstStyle/>
           <a:p>
-            <a:pPr indent="0" marL="0">
+            <a:pPr marL="0" indent="0">
               <a:buNone/>
             </a:pPr>
             <a:r>
@@ -7759,7 +7621,7 @@
           <a:bodyPr wrap="square" rtlCol="0" anchor="ctr"/>
           <a:lstStyle/>
           <a:p>
-            <a:pPr indent="0" marL="0">
+            <a:pPr marL="0" indent="0">
               <a:buNone/>
             </a:pPr>
             <a:r>
@@ -7795,7 +7657,7 @@
           <a:bodyPr wrap="square" rtlCol="0" anchor="ctr"/>
           <a:lstStyle/>
           <a:p>
-            <a:pPr indent="0" marL="0">
+            <a:pPr marL="0" indent="0">
               <a:buNone/>
             </a:pPr>
             <a:r>
@@ -7831,7 +7693,7 @@
           <a:bodyPr wrap="square" rtlCol="0" anchor="ctr"/>
           <a:lstStyle/>
           <a:p>
-            <a:pPr algn="ctr" indent="0" marL="0">
+            <a:pPr marL="0" indent="0" algn="ctr">
               <a:buNone/>
             </a:pPr>
             <a:r>
@@ -7892,7 +7754,7 @@
           <a:bodyPr wrap="square" rtlCol="0" anchor="ctr"/>
           <a:lstStyle/>
           <a:p>
-            <a:pPr indent="0" marL="0">
+            <a:pPr marL="0" indent="0">
               <a:buNone/>
             </a:pPr>
             <a:r>
@@ -7948,7 +7810,7 @@
           <a:bodyPr wrap="square" rtlCol="0" anchor="ctr"/>
           <a:lstStyle/>
           <a:p>
-            <a:pPr algn="ctr" indent="0" marL="0">
+            <a:pPr marL="0" indent="0" algn="ctr">
               <a:buNone/>
             </a:pPr>
             <a:r>
@@ -7984,7 +7846,7 @@
           <a:bodyPr wrap="square" lIns="1270" tIns="1270" rIns="1270" bIns="1270" rtlCol="0" anchor="ctr"/>
           <a:lstStyle/>
           <a:p>
-            <a:pPr indent="0" marL="0">
+            <a:pPr marL="0" indent="0">
               <a:buNone/>
             </a:pPr>
             <a:r>
@@ -8007,7 +7869,7 @@
         </p:nvSpPr>
         <p:spPr>
           <a:xfrm>
-            <a:off x="457200" y="1645920"/>
+            <a:off x="386255" y="914400"/>
             <a:ext cx="2560320" cy="2286000"/>
           </a:xfrm>
           <a:prstGeom prst="rect">
@@ -8020,7 +7882,7 @@
           <a:bodyPr wrap="square" rtlCol="0" anchor="ctr"/>
           <a:lstStyle/>
           <a:p>
-            <a:pPr indent="0" marL="0">
+            <a:pPr marL="0" indent="0">
               <a:buNone/>
             </a:pPr>
             <a:r>
@@ -8034,7 +7896,7 @@
             <a:endParaRPr lang="en-US" sz="1100" dirty="0"/>
           </a:p>
           <a:p>
-            <a:pPr indent="0" marL="0">
+            <a:pPr marL="0" indent="0">
               <a:buNone/>
             </a:pPr>
             <a:r>
@@ -8048,7 +7910,7 @@
             <a:endParaRPr lang="en-US" sz="1100" dirty="0"/>
           </a:p>
           <a:p>
-            <a:pPr indent="0" marL="0">
+            <a:pPr marL="0" indent="0">
               <a:buNone/>
             </a:pPr>
             <a:r>
@@ -8062,7 +7924,7 @@
             <a:endParaRPr lang="en-US" sz="1100" dirty="0"/>
           </a:p>
           <a:p>
-            <a:pPr indent="0" marL="0">
+            <a:pPr marL="0" indent="0">
               <a:buNone/>
             </a:pPr>
             <a:r>
@@ -8076,7 +7938,7 @@
             <a:endParaRPr lang="en-US" sz="1100" dirty="0"/>
           </a:p>
           <a:p>
-            <a:pPr indent="0" marL="0">
+            <a:pPr marL="0" indent="0">
               <a:buNone/>
             </a:pPr>
             <a:r>
@@ -8090,13 +7952,13 @@
             <a:endParaRPr lang="en-US" sz="1100" dirty="0"/>
           </a:p>
           <a:p>
-            <a:pPr indent="0" marL="0">
+            <a:pPr marL="0" indent="0">
               <a:buNone/>
             </a:pPr>
             <a:endParaRPr lang="en-US" sz="1100" dirty="0"/>
           </a:p>
           <a:p>
-            <a:pPr indent="0" marL="0">
+            <a:pPr marL="0" indent="0">
               <a:buNone/>
             </a:pPr>
             <a:r>
@@ -8152,7 +8014,7 @@
           <a:bodyPr wrap="square" rtlCol="0" anchor="ctr"/>
           <a:lstStyle/>
           <a:p>
-            <a:pPr algn="ctr" indent="0" marL="0">
+            <a:pPr marL="0" indent="0" algn="ctr">
               <a:buNone/>
             </a:pPr>
             <a:r>
@@ -8175,7 +8037,7 @@
         </p:nvSpPr>
         <p:spPr>
           <a:xfrm>
-            <a:off x="3291840" y="1645920"/>
+            <a:off x="3291840" y="1371600"/>
             <a:ext cx="2560320" cy="2286000"/>
           </a:xfrm>
           <a:prstGeom prst="rect">
@@ -8188,7 +8050,7 @@
           <a:bodyPr wrap="square" rtlCol="0" anchor="ctr"/>
           <a:lstStyle/>
           <a:p>
-            <a:pPr indent="0" marL="0">
+            <a:pPr marL="0" indent="0">
               <a:buNone/>
             </a:pPr>
             <a:r>
@@ -8197,12 +8059,12 @@
                   <a:srgbClr val="2F3C7E"/>
                 </a:solidFill>
               </a:rPr>
-              <a:t>• Central task decomposition</a:t>
+              <a:t>•Central task decomposition</a:t>
             </a:r>
             <a:endParaRPr lang="en-US" sz="1100" dirty="0"/>
           </a:p>
           <a:p>
-            <a:pPr indent="0" marL="0">
+            <a:pPr marL="0" indent="0">
               <a:buNone/>
             </a:pPr>
             <a:r>
@@ -8216,7 +8078,7 @@
             <a:endParaRPr lang="en-US" sz="1100" dirty="0"/>
           </a:p>
           <a:p>
-            <a:pPr indent="0" marL="0">
+            <a:pPr marL="0" indent="0">
               <a:buNone/>
             </a:pPr>
             <a:r>
@@ -8230,7 +8092,7 @@
             <a:endParaRPr lang="en-US" sz="1100" dirty="0"/>
           </a:p>
           <a:p>
-            <a:pPr indent="0" marL="0">
+            <a:pPr marL="0" indent="0">
               <a:buNone/>
             </a:pPr>
             <a:r>
@@ -8244,7 +8106,7 @@
             <a:endParaRPr lang="en-US" sz="1100" dirty="0"/>
           </a:p>
           <a:p>
-            <a:pPr indent="0" marL="0">
+            <a:pPr marL="0" indent="0">
               <a:buNone/>
             </a:pPr>
             <a:r>
@@ -8258,13 +8120,13 @@
             <a:endParaRPr lang="en-US" sz="1100" dirty="0"/>
           </a:p>
           <a:p>
-            <a:pPr indent="0" marL="0">
+            <a:pPr marL="0" indent="0">
               <a:buNone/>
             </a:pPr>
             <a:endParaRPr lang="en-US" sz="1100" dirty="0"/>
           </a:p>
           <a:p>
-            <a:pPr indent="0" marL="0">
+            <a:pPr marL="0" indent="0">
               <a:buNone/>
             </a:pPr>
             <a:r>
@@ -8320,7 +8182,7 @@
           <a:bodyPr wrap="square" rtlCol="0" anchor="ctr"/>
           <a:lstStyle/>
           <a:p>
-            <a:pPr algn="ctr" indent="0" marL="0">
+            <a:pPr marL="0" indent="0" algn="ctr">
               <a:buNone/>
             </a:pPr>
             <a:r>
@@ -8343,7 +8205,7 @@
         </p:nvSpPr>
         <p:spPr>
           <a:xfrm>
-            <a:off x="6126480" y="1645920"/>
+            <a:off x="6126480" y="1423626"/>
             <a:ext cx="2560320" cy="2286000"/>
           </a:xfrm>
           <a:prstGeom prst="rect">
@@ -8356,7 +8218,7 @@
           <a:bodyPr wrap="square" rtlCol="0" anchor="ctr"/>
           <a:lstStyle/>
           <a:p>
-            <a:pPr indent="0" marL="0">
+            <a:pPr marL="0" indent="0">
               <a:buNone/>
             </a:pPr>
             <a:r>
@@ -8370,7 +8232,7 @@
             <a:endParaRPr lang="en-US" sz="1100" dirty="0"/>
           </a:p>
           <a:p>
-            <a:pPr indent="0" marL="0">
+            <a:pPr marL="0" indent="0">
               <a:buNone/>
             </a:pPr>
             <a:r>
@@ -8384,7 +8246,7 @@
             <a:endParaRPr lang="en-US" sz="1100" dirty="0"/>
           </a:p>
           <a:p>
-            <a:pPr indent="0" marL="0">
+            <a:pPr marL="0" indent="0">
               <a:buNone/>
             </a:pPr>
             <a:r>
@@ -8398,7 +8260,7 @@
             <a:endParaRPr lang="en-US" sz="1100" dirty="0"/>
           </a:p>
           <a:p>
-            <a:pPr indent="0" marL="0">
+            <a:pPr marL="0" indent="0">
               <a:buNone/>
             </a:pPr>
             <a:r>
@@ -8412,7 +8274,7 @@
             <a:endParaRPr lang="en-US" sz="1100" dirty="0"/>
           </a:p>
           <a:p>
-            <a:pPr indent="0" marL="0">
+            <a:pPr marL="0" indent="0">
               <a:buNone/>
             </a:pPr>
             <a:r>
@@ -8426,13 +8288,13 @@
             <a:endParaRPr lang="en-US" sz="1100" dirty="0"/>
           </a:p>
           <a:p>
-            <a:pPr indent="0" marL="0">
+            <a:pPr marL="0" indent="0">
               <a:buNone/>
             </a:pPr>
             <a:endParaRPr lang="en-US" sz="1100" dirty="0"/>
           </a:p>
           <a:p>
-            <a:pPr indent="0" marL="0">
+            <a:pPr marL="0" indent="0">
               <a:buNone/>
             </a:pPr>
             <a:r>
@@ -8468,7 +8330,7 @@
           <a:bodyPr wrap="square" rtlCol="0" anchor="ctr"/>
           <a:lstStyle/>
           <a:p>
-            <a:pPr algn="r" indent="0" marL="0">
+            <a:pPr marL="0" indent="0" algn="r">
               <a:buNone/>
             </a:pPr>
             <a:r>
@@ -8529,7 +8391,7 @@
           <a:bodyPr wrap="square" rtlCol="0" anchor="ctr"/>
           <a:lstStyle/>
           <a:p>
-            <a:pPr indent="0" marL="0">
+            <a:pPr marL="0" indent="0">
               <a:buNone/>
             </a:pPr>
             <a:r>
@@ -8585,7 +8447,7 @@
           <a:bodyPr wrap="square" rtlCol="0" anchor="ctr"/>
           <a:lstStyle/>
           <a:p>
-            <a:pPr indent="0" marL="0">
+            <a:pPr marL="0" indent="0">
               <a:buNone/>
             </a:pPr>
             <a:r>
@@ -8621,7 +8483,7 @@
           <a:bodyPr wrap="square" rtlCol="0" anchor="ctr"/>
           <a:lstStyle/>
           <a:p>
-            <a:pPr indent="0" marL="0">
+            <a:pPr marL="0" indent="0">
               <a:buNone/>
             </a:pPr>
             <a:r>
@@ -8635,7 +8497,7 @@
             <a:endParaRPr lang="en-US" sz="1300" dirty="0"/>
           </a:p>
           <a:p>
-            <a:pPr indent="0" marL="0">
+            <a:pPr marL="0" indent="0">
               <a:buNone/>
             </a:pPr>
             <a:r>
@@ -8649,7 +8511,7 @@
             <a:endParaRPr lang="en-US" sz="1300" dirty="0"/>
           </a:p>
           <a:p>
-            <a:pPr indent="0" marL="0">
+            <a:pPr marL="0" indent="0">
               <a:buNone/>
             </a:pPr>
             <a:r>
@@ -8663,7 +8525,7 @@
             <a:endParaRPr lang="en-US" sz="1300" dirty="0"/>
           </a:p>
           <a:p>
-            <a:pPr indent="0" marL="0">
+            <a:pPr marL="0" indent="0">
               <a:buNone/>
             </a:pPr>
             <a:r>
@@ -8677,7 +8539,7 @@
             <a:endParaRPr lang="en-US" sz="1300" dirty="0"/>
           </a:p>
           <a:p>
-            <a:pPr indent="0" marL="0">
+            <a:pPr marL="0" indent="0">
               <a:buNone/>
             </a:pPr>
             <a:r>
@@ -8691,7 +8553,7 @@
             <a:endParaRPr lang="en-US" sz="1300" dirty="0"/>
           </a:p>
           <a:p>
-            <a:pPr indent="0" marL="0">
+            <a:pPr marL="0" indent="0">
               <a:buNone/>
             </a:pPr>
             <a:r>
@@ -8727,7 +8589,7 @@
           <a:bodyPr wrap="square" rtlCol="0" anchor="ctr"/>
           <a:lstStyle/>
           <a:p>
-            <a:pPr indent="0" marL="0">
+            <a:pPr marL="0" indent="0">
               <a:buNone/>
             </a:pPr>
             <a:r>
@@ -8763,7 +8625,7 @@
           <a:bodyPr wrap="square" rtlCol="0" anchor="ctr"/>
           <a:lstStyle/>
           <a:p>
-            <a:pPr indent="0" marL="0">
+            <a:pPr marL="0" indent="0">
               <a:buNone/>
             </a:pPr>
             <a:r>
@@ -8822,7 +8684,7 @@
           <a:bodyPr wrap="square" rtlCol="0" anchor="ctr"/>
           <a:lstStyle/>
           <a:p>
-            <a:pPr indent="0" marL="0">
+            <a:pPr marL="0" indent="0">
               <a:buNone/>
             </a:pPr>
             <a:r>
@@ -8858,7 +8720,7 @@
           <a:bodyPr wrap="square" rtlCol="0" anchor="ctr"/>
           <a:lstStyle/>
           <a:p>
-            <a:pPr indent="0" marL="0">
+            <a:pPr marL="0" indent="0">
               <a:buNone/>
             </a:pPr>
             <a:r>
@@ -8872,7 +8734,7 @@
             <a:endParaRPr lang="en-US" sz="1200" dirty="0"/>
           </a:p>
           <a:p>
-            <a:pPr indent="0" marL="0">
+            <a:pPr marL="0" indent="0">
               <a:buNone/>
             </a:pPr>
             <a:r>
@@ -8886,7 +8748,7 @@
             <a:endParaRPr lang="en-US" sz="1200" dirty="0"/>
           </a:p>
           <a:p>
-            <a:pPr indent="0" marL="0">
+            <a:pPr marL="0" indent="0">
               <a:buNone/>
             </a:pPr>
             <a:r>
@@ -8900,7 +8762,7 @@
             <a:endParaRPr lang="en-US" sz="1200" dirty="0"/>
           </a:p>
           <a:p>
-            <a:pPr indent="0" marL="0">
+            <a:pPr marL="0" indent="0">
               <a:buNone/>
             </a:pPr>
             <a:r>
@@ -8914,7 +8776,7 @@
             <a:endParaRPr lang="en-US" sz="1200" dirty="0"/>
           </a:p>
           <a:p>
-            <a:pPr indent="0" marL="0">
+            <a:pPr marL="0" indent="0">
               <a:buNone/>
             </a:pPr>
             <a:r>
@@ -8928,7 +8790,7 @@
             <a:endParaRPr lang="en-US" sz="1200" dirty="0"/>
           </a:p>
           <a:p>
-            <a:pPr indent="0" marL="0">
+            <a:pPr marL="0" indent="0">
               <a:buNone/>
             </a:pPr>
             <a:r>
@@ -8942,7 +8804,7 @@
             <a:endParaRPr lang="en-US" sz="1200" dirty="0"/>
           </a:p>
           <a:p>
-            <a:pPr indent="0" marL="0">
+            <a:pPr marL="0" indent="0">
               <a:buNone/>
             </a:pPr>
             <a:r>
@@ -8965,7 +8827,7 @@
         </p:nvSpPr>
         <p:spPr>
           <a:xfrm>
-            <a:off x="4846320" y="3749040"/>
+            <a:off x="4937760" y="3433730"/>
             <a:ext cx="3657600" cy="228600"/>
           </a:xfrm>
           <a:prstGeom prst="rect">
@@ -8978,7 +8840,7 @@
           <a:bodyPr wrap="square" rtlCol="0" anchor="ctr"/>
           <a:lstStyle/>
           <a:p>
-            <a:pPr indent="0" marL="0">
+            <a:pPr marL="0" indent="0">
               <a:buNone/>
             </a:pPr>
             <a:r>
@@ -9014,7 +8876,7 @@
           <a:bodyPr wrap="square" rtlCol="0" anchor="ctr"/>
           <a:lstStyle/>
           <a:p>
-            <a:pPr indent="0" marL="0">
+            <a:pPr marL="0" indent="0">
               <a:buNone/>
             </a:pPr>
             <a:r>
@@ -9031,7 +8893,7 @@
             <a:endParaRPr lang="en-US" sz="1000" dirty="0"/>
           </a:p>
           <a:p>
-            <a:pPr indent="0" marL="0">
+            <a:pPr marL="0" indent="0">
               <a:buNone/>
             </a:pPr>
             <a:r>
@@ -9048,7 +8910,7 @@
             <a:endParaRPr lang="en-US" sz="1000" dirty="0"/>
           </a:p>
           <a:p>
-            <a:pPr indent="0" marL="0">
+            <a:pPr marL="0" indent="0">
               <a:buNone/>
             </a:pPr>
             <a:r>
@@ -9087,7 +8949,7 @@
           <a:bodyPr wrap="square" rtlCol="0" anchor="ctr"/>
           <a:lstStyle/>
           <a:p>
-            <a:pPr algn="r" indent="0" marL="0">
+            <a:pPr marL="0" indent="0" algn="r">
               <a:buNone/>
             </a:pPr>
             <a:r>
@@ -9148,7 +9010,7 @@
           <a:bodyPr wrap="square" rtlCol="0" anchor="ctr"/>
           <a:lstStyle/>
           <a:p>
-            <a:pPr indent="0" marL="0">
+            <a:pPr marL="0" indent="0">
               <a:buNone/>
             </a:pPr>
             <a:r>
@@ -9184,7 +9046,7 @@
           <a:bodyPr wrap="square" rtlCol="0" anchor="ctr"/>
           <a:lstStyle/>
           <a:p>
-            <a:pPr indent="0" marL="0">
+            <a:pPr marL="0" indent="0">
               <a:buNone/>
             </a:pPr>
             <a:r>
@@ -9240,7 +9102,7 @@
           <a:bodyPr wrap="square" rtlCol="0" anchor="ctr"/>
           <a:lstStyle/>
           <a:p>
-            <a:pPr indent="0" marL="0">
+            <a:pPr marL="0" indent="0">
               <a:buNone/>
             </a:pPr>
             <a:r>
@@ -9276,7 +9138,7 @@
           <a:bodyPr wrap="square" rtlCol="0" anchor="ctr"/>
           <a:lstStyle/>
           <a:p>
-            <a:pPr indent="0" marL="0">
+            <a:pPr marL="0" indent="0">
               <a:buNone/>
             </a:pPr>
             <a:r>
@@ -9293,7 +9155,7 @@
             <a:endParaRPr lang="en-US" sz="1100" dirty="0"/>
           </a:p>
           <a:p>
-            <a:pPr indent="0" marL="0">
+            <a:pPr marL="0" indent="0">
               <a:buNone/>
             </a:pPr>
             <a:r>
@@ -9310,13 +9172,13 @@
             <a:endParaRPr lang="en-US" sz="1100" dirty="0"/>
           </a:p>
           <a:p>
-            <a:pPr indent="0" marL="0">
+            <a:pPr marL="0" indent="0">
               <a:buNone/>
             </a:pPr>
             <a:endParaRPr lang="en-US" sz="1100" dirty="0"/>
           </a:p>
           <a:p>
-            <a:pPr indent="0" marL="0">
+            <a:pPr marL="0" indent="0">
               <a:buNone/>
             </a:pPr>
             <a:r>
@@ -9333,7 +9195,7 @@
             <a:endParaRPr lang="en-US" sz="1100" dirty="0"/>
           </a:p>
           <a:p>
-            <a:pPr indent="0" marL="0">
+            <a:pPr marL="0" indent="0">
               <a:buNone/>
             </a:pPr>
             <a:r>
@@ -9350,7 +9212,7 @@
             <a:endParaRPr lang="en-US" sz="1100" dirty="0"/>
           </a:p>
           <a:p>
-            <a:pPr indent="0" marL="0">
+            <a:pPr marL="0" indent="0">
               <a:buNone/>
             </a:pPr>
             <a:r>
@@ -9367,7 +9229,7 @@
             <a:endParaRPr lang="en-US" sz="1100" dirty="0"/>
           </a:p>
           <a:p>
-            <a:pPr indent="0" marL="0">
+            <a:pPr marL="0" indent="0">
               <a:buNone/>
             </a:pPr>
             <a:r>
@@ -9384,7 +9246,7 @@
             <a:endParaRPr lang="en-US" sz="1100" dirty="0"/>
           </a:p>
           <a:p>
-            <a:pPr indent="0" marL="0">
+            <a:pPr marL="0" indent="0">
               <a:buNone/>
             </a:pPr>
             <a:r>
@@ -9401,7 +9263,7 @@
             <a:endParaRPr lang="en-US" sz="1100" dirty="0"/>
           </a:p>
           <a:p>
-            <a:pPr indent="0" marL="0">
+            <a:pPr marL="0" indent="0">
               <a:buNone/>
             </a:pPr>
             <a:r>
@@ -9418,7 +9280,7 @@
             <a:endParaRPr lang="en-US" sz="1100" dirty="0"/>
           </a:p>
           <a:p>
-            <a:pPr indent="0" marL="0">
+            <a:pPr marL="0" indent="0">
               <a:buNone/>
             </a:pPr>
             <a:r>
@@ -9435,13 +9297,13 @@
             <a:endParaRPr lang="en-US" sz="1100" dirty="0"/>
           </a:p>
           <a:p>
-            <a:pPr indent="0" marL="0">
+            <a:pPr marL="0" indent="0">
               <a:buNone/>
             </a:pPr>
             <a:endParaRPr lang="en-US" sz="1100" dirty="0"/>
           </a:p>
           <a:p>
-            <a:pPr indent="0" marL="0">
+            <a:pPr marL="0" indent="0">
               <a:buNone/>
             </a:pPr>
             <a:r>
@@ -9458,7 +9320,7 @@
             <a:endParaRPr lang="en-US" sz="1100" dirty="0"/>
           </a:p>
           <a:p>
-            <a:pPr indent="0" marL="0">
+            <a:pPr marL="0" indent="0">
               <a:buNone/>
             </a:pPr>
             <a:r>
@@ -9475,7 +9337,7 @@
             <a:endParaRPr lang="en-US" sz="1100" dirty="0"/>
           </a:p>
           <a:p>
-            <a:pPr indent="0" marL="0">
+            <a:pPr marL="0" indent="0">
               <a:buNone/>
             </a:pPr>
             <a:r>
@@ -9514,7 +9376,7 @@
           <a:bodyPr wrap="square" rtlCol="0" anchor="ctr"/>
           <a:lstStyle/>
           <a:p>
-            <a:pPr algn="r" indent="0" marL="0">
+            <a:pPr marL="0" indent="0" algn="r">
               <a:buNone/>
             </a:pPr>
             <a:r>
@@ -9575,7 +9437,7 @@
           <a:bodyPr wrap="square" rtlCol="0" anchor="ctr"/>
           <a:lstStyle/>
           <a:p>
-            <a:pPr indent="0" marL="0">
+            <a:pPr marL="0" indent="0">
               <a:buNone/>
             </a:pPr>
             <a:r>
@@ -9611,7 +9473,7 @@
           <a:bodyPr wrap="square" rtlCol="0" anchor="ctr"/>
           <a:lstStyle/>
           <a:p>
-            <a:pPr indent="0" marL="0">
+            <a:pPr marL="0" indent="0">
               <a:buNone/>
             </a:pPr>
             <a:r>
@@ -9667,7 +9529,7 @@
           <a:bodyPr wrap="square" rtlCol="0" anchor="ctr"/>
           <a:lstStyle/>
           <a:p>
-            <a:pPr indent="0" marL="0">
+            <a:pPr marL="0" indent="0">
               <a:buNone/>
             </a:pPr>
             <a:r>
@@ -9703,7 +9565,7 @@
           <a:bodyPr wrap="square" rtlCol="0" anchor="ctr"/>
           <a:lstStyle/>
           <a:p>
-            <a:pPr indent="0" marL="0">
+            <a:pPr marL="0" indent="0">
               <a:buNone/>
             </a:pPr>
             <a:r>
@@ -9717,7 +9579,7 @@
             <a:endParaRPr lang="en-US" sz="1200" dirty="0"/>
           </a:p>
           <a:p>
-            <a:pPr indent="0" marL="0">
+            <a:pPr marL="0" indent="0">
               <a:buNone/>
             </a:pPr>
             <a:r>
@@ -9731,7 +9593,7 @@
             <a:endParaRPr lang="en-US" sz="1200" dirty="0"/>
           </a:p>
           <a:p>
-            <a:pPr indent="0" marL="0">
+            <a:pPr marL="0" indent="0">
               <a:buNone/>
             </a:pPr>
             <a:r>
@@ -9745,7 +9607,7 @@
             <a:endParaRPr lang="en-US" sz="1200" dirty="0"/>
           </a:p>
           <a:p>
-            <a:pPr indent="0" marL="0">
+            <a:pPr marL="0" indent="0">
               <a:buNone/>
             </a:pPr>
             <a:r>
@@ -9759,7 +9621,7 @@
             <a:endParaRPr lang="en-US" sz="1200" dirty="0"/>
           </a:p>
           <a:p>
-            <a:pPr indent="0" marL="0">
+            <a:pPr marL="0" indent="0">
               <a:buNone/>
             </a:pPr>
             <a:r>
@@ -9773,7 +9635,7 @@
             <a:endParaRPr lang="en-US" sz="1200" dirty="0"/>
           </a:p>
           <a:p>
-            <a:pPr indent="0" marL="0">
+            <a:pPr marL="0" indent="0">
               <a:buNone/>
             </a:pPr>
             <a:r>
@@ -9829,7 +9691,7 @@
           <a:bodyPr wrap="square" rtlCol="0" anchor="ctr"/>
           <a:lstStyle/>
           <a:p>
-            <a:pPr indent="0" marL="0">
+            <a:pPr marL="0" indent="0">
               <a:buNone/>
             </a:pPr>
             <a:r>
@@ -9865,7 +9727,7 @@
           <a:bodyPr wrap="square" rtlCol="0" anchor="ctr"/>
           <a:lstStyle/>
           <a:p>
-            <a:pPr indent="0" marL="0">
+            <a:pPr marL="0" indent="0">
               <a:buNone/>
             </a:pPr>
             <a:r>
@@ -9879,7 +9741,7 @@
             <a:endParaRPr lang="en-US" sz="1200" dirty="0"/>
           </a:p>
           <a:p>
-            <a:pPr indent="0" marL="0">
+            <a:pPr marL="0" indent="0">
               <a:buNone/>
             </a:pPr>
             <a:r>
@@ -9893,7 +9755,7 @@
             <a:endParaRPr lang="en-US" sz="1200" dirty="0"/>
           </a:p>
           <a:p>
-            <a:pPr indent="0" marL="0">
+            <a:pPr marL="0" indent="0">
               <a:buNone/>
             </a:pPr>
             <a:r>
@@ -9907,7 +9769,7 @@
             <a:endParaRPr lang="en-US" sz="1200" dirty="0"/>
           </a:p>
           <a:p>
-            <a:pPr indent="0" marL="0">
+            <a:pPr marL="0" indent="0">
               <a:buNone/>
             </a:pPr>
             <a:r>
@@ -9921,7 +9783,7 @@
             <a:endParaRPr lang="en-US" sz="1200" dirty="0"/>
           </a:p>
           <a:p>
-            <a:pPr indent="0" marL="0">
+            <a:pPr marL="0" indent="0">
               <a:buNone/>
             </a:pPr>
             <a:r>
@@ -9935,7 +9797,7 @@
             <a:endParaRPr lang="en-US" sz="1200" dirty="0"/>
           </a:p>
           <a:p>
-            <a:pPr indent="0" marL="0">
+            <a:pPr marL="0" indent="0">
               <a:buNone/>
             </a:pPr>
             <a:r>
@@ -9971,7 +9833,7 @@
           <a:bodyPr wrap="square" rtlCol="0" anchor="ctr"/>
           <a:lstStyle/>
           <a:p>
-            <a:pPr indent="0" marL="0">
+            <a:pPr marL="0" indent="0">
               <a:buNone/>
             </a:pPr>
             <a:r>
@@ -10007,7 +9869,7 @@
           <a:bodyPr wrap="square" rtlCol="0" anchor="ctr"/>
           <a:lstStyle/>
           <a:p>
-            <a:pPr algn="r" indent="0" marL="0">
+            <a:pPr marL="0" indent="0" algn="r">
               <a:buNone/>
             </a:pPr>
             <a:r>
@@ -10068,7 +9930,7 @@
           <a:bodyPr wrap="square" rtlCol="0" anchor="ctr"/>
           <a:lstStyle/>
           <a:p>
-            <a:pPr indent="0" marL="0">
+            <a:pPr marL="0" indent="0">
               <a:buNone/>
             </a:pPr>
             <a:r>
@@ -10124,7 +9986,7 @@
           <a:bodyPr wrap="square" rtlCol="0" anchor="ctr"/>
           <a:lstStyle/>
           <a:p>
-            <a:pPr indent="0" marL="0">
+            <a:pPr marL="0" indent="0">
               <a:buNone/>
             </a:pPr>
             <a:r>
@@ -10160,7 +10022,7 @@
           <a:bodyPr wrap="square" rtlCol="0" anchor="ctr"/>
           <a:lstStyle/>
           <a:p>
-            <a:pPr indent="0" marL="0">
+            <a:pPr marL="0" indent="0">
               <a:buNone/>
             </a:pPr>
             <a:r>
@@ -10174,7 +10036,7 @@
             <a:endParaRPr lang="en-US" sz="1200" dirty="0"/>
           </a:p>
           <a:p>
-            <a:pPr indent="0" marL="0">
+            <a:pPr marL="0" indent="0">
               <a:buNone/>
             </a:pPr>
             <a:r>
@@ -10188,7 +10050,7 @@
             <a:endParaRPr lang="en-US" sz="1200" dirty="0"/>
           </a:p>
           <a:p>
-            <a:pPr indent="0" marL="0">
+            <a:pPr marL="0" indent="0">
               <a:buNone/>
             </a:pPr>
             <a:r>
@@ -10202,7 +10064,7 @@
             <a:endParaRPr lang="en-US" sz="1200" dirty="0"/>
           </a:p>
           <a:p>
-            <a:pPr indent="0" marL="0">
+            <a:pPr marL="0" indent="0">
               <a:buNone/>
             </a:pPr>
             <a:r>
@@ -10216,7 +10078,7 @@
             <a:endParaRPr lang="en-US" sz="1200" dirty="0"/>
           </a:p>
           <a:p>
-            <a:pPr indent="0" marL="0">
+            <a:pPr marL="0" indent="0">
               <a:buNone/>
             </a:pPr>
             <a:r>
@@ -10230,7 +10092,7 @@
             <a:endParaRPr lang="en-US" sz="1200" dirty="0"/>
           </a:p>
           <a:p>
-            <a:pPr indent="0" marL="0">
+            <a:pPr marL="0" indent="0">
               <a:buNone/>
             </a:pPr>
             <a:r>
@@ -10244,7 +10106,7 @@
             <a:endParaRPr lang="en-US" sz="1200" dirty="0"/>
           </a:p>
           <a:p>
-            <a:pPr indent="0" marL="0">
+            <a:pPr marL="0" indent="0">
               <a:buNone/>
             </a:pPr>
             <a:r>
@@ -10280,7 +10142,7 @@
           <a:bodyPr wrap="square" rtlCol="0" anchor="ctr"/>
           <a:lstStyle/>
           <a:p>
-            <a:pPr indent="0" marL="0">
+            <a:pPr marL="0" indent="0">
               <a:buNone/>
             </a:pPr>
             <a:r>
@@ -10316,7 +10178,7 @@
           <a:bodyPr wrap="square" rtlCol="0" anchor="ctr"/>
           <a:lstStyle/>
           <a:p>
-            <a:pPr indent="0" marL="0">
+            <a:pPr marL="0" indent="0">
               <a:buNone/>
             </a:pPr>
             <a:r>
@@ -10375,7 +10237,7 @@
           <a:bodyPr wrap="square" rtlCol="0" anchor="ctr"/>
           <a:lstStyle/>
           <a:p>
-            <a:pPr indent="0" marL="0">
+            <a:pPr marL="0" indent="0">
               <a:buNone/>
             </a:pPr>
             <a:r>
@@ -10411,7 +10273,7 @@
           <a:bodyPr wrap="square" rtlCol="0" anchor="ctr"/>
           <a:lstStyle/>
           <a:p>
-            <a:pPr indent="0" marL="0">
+            <a:pPr marL="0" indent="0">
               <a:buNone/>
             </a:pPr>
             <a:r>
@@ -10447,7 +10309,7 @@
           <a:bodyPr wrap="square" rtlCol="0" anchor="ctr"/>
           <a:lstStyle/>
           <a:p>
-            <a:pPr indent="0" marL="0">
+            <a:pPr marL="0" indent="0">
               <a:buNone/>
             </a:pPr>
             <a:r>
@@ -10461,7 +10323,7 @@
             <a:endParaRPr lang="en-US" sz="1200" dirty="0"/>
           </a:p>
           <a:p>
-            <a:pPr indent="0" marL="0">
+            <a:pPr marL="0" indent="0">
               <a:buNone/>
             </a:pPr>
             <a:r>
@@ -10475,7 +10337,7 @@
             <a:endParaRPr lang="en-US" sz="1200" dirty="0"/>
           </a:p>
           <a:p>
-            <a:pPr indent="0" marL="0">
+            <a:pPr marL="0" indent="0">
               <a:buNone/>
             </a:pPr>
             <a:r>
@@ -10489,7 +10351,7 @@
             <a:endParaRPr lang="en-US" sz="1200" dirty="0"/>
           </a:p>
           <a:p>
-            <a:pPr indent="0" marL="0">
+            <a:pPr marL="0" indent="0">
               <a:buNone/>
             </a:pPr>
             <a:r>
@@ -10503,7 +10365,7 @@
             <a:endParaRPr lang="en-US" sz="1200" dirty="0"/>
           </a:p>
           <a:p>
-            <a:pPr indent="0" marL="0">
+            <a:pPr marL="0" indent="0">
               <a:buNone/>
             </a:pPr>
             <a:r>
@@ -10517,7 +10379,7 @@
             <a:endParaRPr lang="en-US" sz="1200" dirty="0"/>
           </a:p>
           <a:p>
-            <a:pPr indent="0" marL="0">
+            <a:pPr marL="0" indent="0">
               <a:buNone/>
             </a:pPr>
             <a:r>
@@ -10553,7 +10415,7 @@
           <a:bodyPr wrap="square" rtlCol="0" anchor="ctr"/>
           <a:lstStyle/>
           <a:p>
-            <a:pPr indent="0" marL="0">
+            <a:pPr marL="0" indent="0">
               <a:buNone/>
             </a:pPr>
             <a:r>
@@ -10567,7 +10429,7 @@
             <a:endParaRPr lang="en-US" sz="1100" dirty="0"/>
           </a:p>
           <a:p>
-            <a:pPr indent="0" marL="0">
+            <a:pPr marL="0" indent="0">
               <a:buNone/>
             </a:pPr>
             <a:r>
@@ -10603,7 +10465,7 @@
           <a:bodyPr wrap="square" rtlCol="0" anchor="ctr"/>
           <a:lstStyle/>
           <a:p>
-            <a:pPr algn="r" indent="0" marL="0">
+            <a:pPr marL="0" indent="0" algn="r">
               <a:buNone/>
             </a:pPr>
             <a:r>
@@ -10664,7 +10526,7 @@
           <a:bodyPr wrap="square" rtlCol="0" anchor="ctr"/>
           <a:lstStyle/>
           <a:p>
-            <a:pPr indent="0" marL="0">
+            <a:pPr marL="0" indent="0">
               <a:buNone/>
             </a:pPr>
             <a:r>
@@ -10695,15 +10557,27 @@
         </p:nvGraphicFramePr>
         <p:xfrm>
           <a:off x="457200" y="1005840"/>
-          <a:ext cx="8229600" cy="2834640"/>
+          <a:ext cx="8229600" cy="3218688"/>
         </p:xfrm>
         <a:graphic>
           <a:graphicData uri="http://schemas.openxmlformats.org/drawingml/2006/table">
             <a:tbl>
               <a:tblPr/>
               <a:tblGrid>
-                <a:gridCol w="4114800"/>
-                <a:gridCol w="4114800"/>
+                <a:gridCol w="4114800">
+                  <a:extLst>
+                    <a:ext uri="{9D8B030D-6E8A-4147-A177-3AD203B41FA5}">
+                      <a16:colId xmlns:a16="http://schemas.microsoft.com/office/drawing/2014/main" val="20000"/>
+                    </a:ext>
+                  </a:extLst>
+                </a:gridCol>
+                <a:gridCol w="4114800">
+                  <a:extLst>
+                    <a:ext uri="{9D8B030D-6E8A-4147-A177-3AD203B41FA5}">
+                      <a16:colId xmlns:a16="http://schemas.microsoft.com/office/drawing/2014/main" val="20001"/>
+                    </a:ext>
+                  </a:extLst>
+                </a:gridCol>
               </a:tblGrid>
               <a:tr h="402336">
                 <a:tc>
@@ -10711,7 +10585,7 @@
                     <a:bodyPr/>
                     <a:lstStyle/>
                     <a:p>
-                      <a:pPr algn="l" indent="0" marL="0">
+                      <a:pPr marL="0" indent="0" algn="l">
                         <a:buNone/>
                       </a:pPr>
                       <a:r>
@@ -10725,7 +10599,7 @@
                       <a:endParaRPr lang="en-US" sz="1300" dirty="0"/>
                     </a:p>
                   </a:txBody>
-                  <a:tcPr marL="91440" marR="91440" marT="45720" marB="45720" anchor="ctr">
+                  <a:tcPr anchor="ctr">
                     <a:lnL w="12700" cap="flat" cmpd="sng" algn="ctr">
                       <a:solidFill>
                         <a:srgbClr val="CCCCCC"/>
@@ -10772,7 +10646,7 @@
                     <a:bodyPr/>
                     <a:lstStyle/>
                     <a:p>
-                      <a:pPr algn="l" indent="0" marL="0">
+                      <a:pPr marL="0" indent="0" algn="l">
                         <a:buNone/>
                       </a:pPr>
                       <a:r>
@@ -10786,7 +10660,7 @@
                       <a:endParaRPr lang="en-US" sz="1300" dirty="0"/>
                     </a:p>
                   </a:txBody>
-                  <a:tcPr marL="91440" marR="91440" marT="45720" marB="45720" anchor="ctr">
+                  <a:tcPr anchor="ctr">
                     <a:lnL w="12700" cap="flat" cmpd="sng" algn="ctr">
                       <a:solidFill>
                         <a:srgbClr val="CCCCCC"/>
@@ -10828,6 +10702,11 @@
                     </a:solidFill>
                   </a:tcPr>
                 </a:tc>
+                <a:extLst>
+                  <a:ext uri="{0D108BD9-81ED-4DB2-BD59-A6C34878D82A}">
+                    <a16:rowId xmlns:a16="http://schemas.microsoft.com/office/drawing/2014/main" val="10000"/>
+                  </a:ext>
+                </a:extLst>
               </a:tr>
               <a:tr h="402336">
                 <a:tc>
@@ -10835,7 +10714,7 @@
                     <a:bodyPr/>
                     <a:lstStyle/>
                     <a:p>
-                      <a:pPr algn="l" indent="0" marL="0">
+                      <a:pPr marL="0" indent="0" algn="l">
                         <a:buNone/>
                       </a:pPr>
                       <a:r>
@@ -10849,7 +10728,7 @@
                       <a:endParaRPr lang="en-US" sz="1300" dirty="0"/>
                     </a:p>
                   </a:txBody>
-                  <a:tcPr marL="91440" marR="91440" marT="45720" marB="45720" anchor="ctr">
+                  <a:tcPr anchor="ctr">
                     <a:lnL w="12700" cap="flat" cmpd="sng" algn="ctr">
                       <a:solidFill>
                         <a:srgbClr val="CCCCCC"/>
@@ -10896,7 +10775,7 @@
                     <a:bodyPr/>
                     <a:lstStyle/>
                     <a:p>
-                      <a:pPr algn="l" indent="0" marL="0">
+                      <a:pPr marL="0" indent="0" algn="l">
                         <a:buNone/>
                       </a:pPr>
                       <a:r>
@@ -10910,7 +10789,7 @@
                       <a:endParaRPr lang="en-US" sz="1300" dirty="0"/>
                     </a:p>
                   </a:txBody>
-                  <a:tcPr marL="91440" marR="91440" marT="45720" marB="45720" anchor="ctr">
+                  <a:tcPr anchor="ctr">
                     <a:lnL w="12700" cap="flat" cmpd="sng" algn="ctr">
                       <a:solidFill>
                         <a:srgbClr val="CCCCCC"/>
@@ -10952,6 +10831,11 @@
                     </a:solidFill>
                   </a:tcPr>
                 </a:tc>
+                <a:extLst>
+                  <a:ext uri="{0D108BD9-81ED-4DB2-BD59-A6C34878D82A}">
+                    <a16:rowId xmlns:a16="http://schemas.microsoft.com/office/drawing/2014/main" val="10001"/>
+                  </a:ext>
+                </a:extLst>
               </a:tr>
               <a:tr h="402336">
                 <a:tc>
@@ -10959,7 +10843,7 @@
                     <a:bodyPr/>
                     <a:lstStyle/>
                     <a:p>
-                      <a:pPr algn="l" indent="0" marL="0">
+                      <a:pPr marL="0" indent="0" algn="l">
                         <a:buNone/>
                       </a:pPr>
                       <a:r>
@@ -10973,7 +10857,7 @@
                       <a:endParaRPr lang="en-US" sz="1300" dirty="0"/>
                     </a:p>
                   </a:txBody>
-                  <a:tcPr marL="91440" marR="91440" marT="45720" marB="45720" anchor="ctr">
+                  <a:tcPr anchor="ctr">
                     <a:lnL w="12700" cap="flat" cmpd="sng" algn="ctr">
                       <a:solidFill>
                         <a:srgbClr val="CCCCCC"/>
@@ -11020,7 +10904,7 @@
                     <a:bodyPr/>
                     <a:lstStyle/>
                     <a:p>
-                      <a:pPr algn="l" indent="0" marL="0">
+                      <a:pPr marL="0" indent="0" algn="l">
                         <a:buNone/>
                       </a:pPr>
                       <a:r>
@@ -11034,7 +10918,7 @@
                       <a:endParaRPr lang="en-US" sz="1300" dirty="0"/>
                     </a:p>
                   </a:txBody>
-                  <a:tcPr marL="91440" marR="91440" marT="45720" marB="45720" anchor="ctr">
+                  <a:tcPr anchor="ctr">
                     <a:lnL w="12700" cap="flat" cmpd="sng" algn="ctr">
                       <a:solidFill>
                         <a:srgbClr val="CCCCCC"/>
@@ -11076,6 +10960,11 @@
                     </a:solidFill>
                   </a:tcPr>
                 </a:tc>
+                <a:extLst>
+                  <a:ext uri="{0D108BD9-81ED-4DB2-BD59-A6C34878D82A}">
+                    <a16:rowId xmlns:a16="http://schemas.microsoft.com/office/drawing/2014/main" val="10002"/>
+                  </a:ext>
+                </a:extLst>
               </a:tr>
               <a:tr h="402336">
                 <a:tc>
@@ -11083,7 +10972,7 @@
                     <a:bodyPr/>
                     <a:lstStyle/>
                     <a:p>
-                      <a:pPr algn="l" indent="0" marL="0">
+                      <a:pPr marL="0" indent="0" algn="l">
                         <a:buNone/>
                       </a:pPr>
                       <a:r>
@@ -11097,7 +10986,7 @@
                       <a:endParaRPr lang="en-US" sz="1300" dirty="0"/>
                     </a:p>
                   </a:txBody>
-                  <a:tcPr marL="91440" marR="91440" marT="45720" marB="45720" anchor="ctr">
+                  <a:tcPr anchor="ctr">
                     <a:lnL w="12700" cap="flat" cmpd="sng" algn="ctr">
                       <a:solidFill>
                         <a:srgbClr val="CCCCCC"/>
@@ -11144,7 +11033,7 @@
                     <a:bodyPr/>
                     <a:lstStyle/>
                     <a:p>
-                      <a:pPr algn="l" indent="0" marL="0">
+                      <a:pPr marL="0" indent="0" algn="l">
                         <a:buNone/>
                       </a:pPr>
                       <a:r>
@@ -11158,7 +11047,7 @@
                       <a:endParaRPr lang="en-US" sz="1300" dirty="0"/>
                     </a:p>
                   </a:txBody>
-                  <a:tcPr marL="91440" marR="91440" marT="45720" marB="45720" anchor="ctr">
+                  <a:tcPr anchor="ctr">
                     <a:lnL w="12700" cap="flat" cmpd="sng" algn="ctr">
                       <a:solidFill>
                         <a:srgbClr val="CCCCCC"/>
@@ -11200,6 +11089,11 @@
                     </a:solidFill>
                   </a:tcPr>
                 </a:tc>
+                <a:extLst>
+                  <a:ext uri="{0D108BD9-81ED-4DB2-BD59-A6C34878D82A}">
+                    <a16:rowId xmlns:a16="http://schemas.microsoft.com/office/drawing/2014/main" val="10003"/>
+                  </a:ext>
+                </a:extLst>
               </a:tr>
               <a:tr h="402336">
                 <a:tc>
@@ -11207,7 +11101,7 @@
                     <a:bodyPr/>
                     <a:lstStyle/>
                     <a:p>
-                      <a:pPr algn="l" indent="0" marL="0">
+                      <a:pPr marL="0" indent="0" algn="l">
                         <a:buNone/>
                       </a:pPr>
                       <a:r>
@@ -11221,7 +11115,7 @@
                       <a:endParaRPr lang="en-US" sz="1300" dirty="0"/>
                     </a:p>
                   </a:txBody>
-                  <a:tcPr marL="91440" marR="91440" marT="45720" marB="45720" anchor="ctr">
+                  <a:tcPr anchor="ctr">
                     <a:lnL w="12700" cap="flat" cmpd="sng" algn="ctr">
                       <a:solidFill>
                         <a:srgbClr val="CCCCCC"/>
@@ -11268,7 +11162,7 @@
                     <a:bodyPr/>
                     <a:lstStyle/>
                     <a:p>
-                      <a:pPr algn="l" indent="0" marL="0">
+                      <a:pPr marL="0" indent="0" algn="l">
                         <a:buNone/>
                       </a:pPr>
                       <a:r>
@@ -11282,7 +11176,7 @@
                       <a:endParaRPr lang="en-US" sz="1300" dirty="0"/>
                     </a:p>
                   </a:txBody>
-                  <a:tcPr marL="91440" marR="91440" marT="45720" marB="45720" anchor="ctr">
+                  <a:tcPr anchor="ctr">
                     <a:lnL w="12700" cap="flat" cmpd="sng" algn="ctr">
                       <a:solidFill>
                         <a:srgbClr val="CCCCCC"/>
@@ -11324,6 +11218,11 @@
                     </a:solidFill>
                   </a:tcPr>
                 </a:tc>
+                <a:extLst>
+                  <a:ext uri="{0D108BD9-81ED-4DB2-BD59-A6C34878D82A}">
+                    <a16:rowId xmlns:a16="http://schemas.microsoft.com/office/drawing/2014/main" val="10004"/>
+                  </a:ext>
+                </a:extLst>
               </a:tr>
               <a:tr h="402336">
                 <a:tc>
@@ -11331,7 +11230,7 @@
                     <a:bodyPr/>
                     <a:lstStyle/>
                     <a:p>
-                      <a:pPr algn="l" indent="0" marL="0">
+                      <a:pPr marL="0" indent="0" algn="l">
                         <a:buNone/>
                       </a:pPr>
                       <a:r>
@@ -11345,7 +11244,7 @@
                       <a:endParaRPr lang="en-US" sz="1300" dirty="0"/>
                     </a:p>
                   </a:txBody>
-                  <a:tcPr marL="91440" marR="91440" marT="45720" marB="45720" anchor="ctr">
+                  <a:tcPr anchor="ctr">
                     <a:lnL w="12700" cap="flat" cmpd="sng" algn="ctr">
                       <a:solidFill>
                         <a:srgbClr val="CCCCCC"/>
@@ -11392,7 +11291,7 @@
                     <a:bodyPr/>
                     <a:lstStyle/>
                     <a:p>
-                      <a:pPr algn="l" indent="0" marL="0">
+                      <a:pPr marL="0" indent="0" algn="l">
                         <a:buNone/>
                       </a:pPr>
                       <a:r>
@@ -11406,7 +11305,7 @@
                       <a:endParaRPr lang="en-US" sz="1300" dirty="0"/>
                     </a:p>
                   </a:txBody>
-                  <a:tcPr marL="91440" marR="91440" marT="45720" marB="45720" anchor="ctr">
+                  <a:tcPr anchor="ctr">
                     <a:lnL w="12700" cap="flat" cmpd="sng" algn="ctr">
                       <a:solidFill>
                         <a:srgbClr val="CCCCCC"/>
@@ -11448,6 +11347,11 @@
                     </a:solidFill>
                   </a:tcPr>
                 </a:tc>
+                <a:extLst>
+                  <a:ext uri="{0D108BD9-81ED-4DB2-BD59-A6C34878D82A}">
+                    <a16:rowId xmlns:a16="http://schemas.microsoft.com/office/drawing/2014/main" val="10005"/>
+                  </a:ext>
+                </a:extLst>
               </a:tr>
               <a:tr h="402336">
                 <a:tc>
@@ -11455,7 +11359,7 @@
                     <a:bodyPr/>
                     <a:lstStyle/>
                     <a:p>
-                      <a:pPr algn="l" indent="0" marL="0">
+                      <a:pPr marL="0" indent="0" algn="l">
                         <a:buNone/>
                       </a:pPr>
                       <a:r>
@@ -11469,7 +11373,7 @@
                       <a:endParaRPr lang="en-US" sz="1300" dirty="0"/>
                     </a:p>
                   </a:txBody>
-                  <a:tcPr marL="91440" marR="91440" marT="45720" marB="45720" anchor="ctr">
+                  <a:tcPr anchor="ctr">
                     <a:lnL w="12700" cap="flat" cmpd="sng" algn="ctr">
                       <a:solidFill>
                         <a:srgbClr val="CCCCCC"/>
@@ -11516,7 +11420,7 @@
                     <a:bodyPr/>
                     <a:lstStyle/>
                     <a:p>
-                      <a:pPr algn="l" indent="0" marL="0">
+                      <a:pPr marL="0" indent="0" algn="l">
                         <a:buNone/>
                       </a:pPr>
                       <a:r>
@@ -11530,7 +11434,7 @@
                       <a:endParaRPr lang="en-US" sz="1300" dirty="0"/>
                     </a:p>
                   </a:txBody>
-                  <a:tcPr marL="91440" marR="91440" marT="45720" marB="45720" anchor="ctr">
+                  <a:tcPr anchor="ctr">
                     <a:lnL w="12700" cap="flat" cmpd="sng" algn="ctr">
                       <a:solidFill>
                         <a:srgbClr val="CCCCCC"/>
@@ -11572,6 +11476,11 @@
                     </a:solidFill>
                   </a:tcPr>
                 </a:tc>
+                <a:extLst>
+                  <a:ext uri="{0D108BD9-81ED-4DB2-BD59-A6C34878D82A}">
+                    <a16:rowId xmlns:a16="http://schemas.microsoft.com/office/drawing/2014/main" val="10006"/>
+                  </a:ext>
+                </a:extLst>
               </a:tr>
               <a:tr h="402336">
                 <a:tc>
@@ -11579,7 +11488,7 @@
                     <a:bodyPr/>
                     <a:lstStyle/>
                     <a:p>
-                      <a:pPr algn="l" indent="0" marL="0">
+                      <a:pPr marL="0" indent="0" algn="l">
                         <a:buNone/>
                       </a:pPr>
                       <a:r>
@@ -11593,7 +11502,7 @@
                       <a:endParaRPr lang="en-US" sz="1300" dirty="0"/>
                     </a:p>
                   </a:txBody>
-                  <a:tcPr marL="91440" marR="91440" marT="45720" marB="45720" anchor="ctr">
+                  <a:tcPr anchor="ctr">
                     <a:lnL w="12700" cap="flat" cmpd="sng" algn="ctr">
                       <a:solidFill>
                         <a:srgbClr val="CCCCCC"/>
@@ -11640,7 +11549,7 @@
                     <a:bodyPr/>
                     <a:lstStyle/>
                     <a:p>
-                      <a:pPr algn="l" indent="0" marL="0">
+                      <a:pPr marL="0" indent="0" algn="l">
                         <a:buNone/>
                       </a:pPr>
                       <a:r>
@@ -11654,7 +11563,7 @@
                       <a:endParaRPr lang="en-US" sz="1300" dirty="0"/>
                     </a:p>
                   </a:txBody>
-                  <a:tcPr marL="91440" marR="91440" marT="45720" marB="45720" anchor="ctr">
+                  <a:tcPr anchor="ctr">
                     <a:lnL w="12700" cap="flat" cmpd="sng" algn="ctr">
                       <a:solidFill>
                         <a:srgbClr val="CCCCCC"/>
@@ -11696,6 +11605,11 @@
                     </a:solidFill>
                   </a:tcPr>
                 </a:tc>
+                <a:extLst>
+                  <a:ext uri="{0D108BD9-81ED-4DB2-BD59-A6C34878D82A}">
+                    <a16:rowId xmlns:a16="http://schemas.microsoft.com/office/drawing/2014/main" val="10007"/>
+                  </a:ext>
+                </a:extLst>
               </a:tr>
             </a:tbl>
           </a:graphicData>
@@ -11709,7 +11623,7 @@
         </p:nvSpPr>
         <p:spPr>
           <a:xfrm>
-            <a:off x="457200" y="4023360"/>
+            <a:off x="457200" y="4498848"/>
             <a:ext cx="8229600" cy="365760"/>
           </a:xfrm>
           <a:prstGeom prst="rect">
@@ -11722,7 +11636,7 @@
           <a:bodyPr wrap="square" rtlCol="0" anchor="ctr"/>
           <a:lstStyle/>
           <a:p>
-            <a:pPr indent="0" marL="0">
+            <a:pPr marL="0" indent="0">
               <a:buNone/>
             </a:pPr>
             <a:r>
@@ -11758,7 +11672,7 @@
           <a:bodyPr wrap="square" rtlCol="0" anchor="ctr"/>
           <a:lstStyle/>
           <a:p>
-            <a:pPr algn="r" indent="0" marL="0">
+            <a:pPr marL="0" indent="0" algn="r">
               <a:buNone/>
             </a:pPr>
             <a:r>
@@ -11819,7 +11733,7 @@
           <a:bodyPr wrap="square" rtlCol="0" anchor="ctr"/>
           <a:lstStyle/>
           <a:p>
-            <a:pPr indent="0" marL="0">
+            <a:pPr marL="0" indent="0">
               <a:buNone/>
             </a:pPr>
             <a:r>
@@ -11875,7 +11789,7 @@
           <a:bodyPr wrap="square" rtlCol="0" anchor="ctr"/>
           <a:lstStyle/>
           <a:p>
-            <a:pPr indent="0" marL="0">
+            <a:pPr marL="0" indent="0">
               <a:buNone/>
             </a:pPr>
             <a:r>
@@ -11911,7 +11825,7 @@
           <a:bodyPr wrap="square" rtlCol="0" anchor="ctr"/>
           <a:lstStyle/>
           <a:p>
-            <a:pPr indent="0" marL="0">
+            <a:pPr marL="0" indent="0">
               <a:buNone/>
             </a:pPr>
             <a:r>
@@ -11925,7 +11839,7 @@
             <a:endParaRPr lang="en-US" sz="1200" dirty="0"/>
           </a:p>
           <a:p>
-            <a:pPr indent="0" marL="0">
+            <a:pPr marL="0" indent="0">
               <a:buNone/>
             </a:pPr>
             <a:r>
@@ -11939,7 +11853,7 @@
             <a:endParaRPr lang="en-US" sz="1200" dirty="0"/>
           </a:p>
           <a:p>
-            <a:pPr indent="0" marL="0">
+            <a:pPr marL="0" indent="0">
               <a:buNone/>
             </a:pPr>
             <a:r>
@@ -11953,7 +11867,7 @@
             <a:endParaRPr lang="en-US" sz="1200" dirty="0"/>
           </a:p>
           <a:p>
-            <a:pPr indent="0" marL="0">
+            <a:pPr marL="0" indent="0">
               <a:buNone/>
             </a:pPr>
             <a:r>
@@ -12009,7 +11923,7 @@
           <a:bodyPr wrap="square" rtlCol="0" anchor="ctr"/>
           <a:lstStyle/>
           <a:p>
-            <a:pPr indent="0" marL="0">
+            <a:pPr marL="0" indent="0">
               <a:buNone/>
             </a:pPr>
             <a:r>
@@ -12045,7 +11959,7 @@
           <a:bodyPr wrap="square" rtlCol="0" anchor="ctr"/>
           <a:lstStyle/>
           <a:p>
-            <a:pPr indent="0" marL="0">
+            <a:pPr marL="0" indent="0">
               <a:buNone/>
             </a:pPr>
             <a:r>
@@ -12059,7 +11973,7 @@
             <a:endParaRPr lang="en-US" sz="1200" dirty="0"/>
           </a:p>
           <a:p>
-            <a:pPr indent="0" marL="0">
+            <a:pPr marL="0" indent="0">
               <a:buNone/>
             </a:pPr>
             <a:r>
@@ -12073,7 +11987,7 @@
             <a:endParaRPr lang="en-US" sz="1200" dirty="0"/>
           </a:p>
           <a:p>
-            <a:pPr indent="0" marL="0">
+            <a:pPr marL="0" indent="0">
               <a:buNone/>
             </a:pPr>
             <a:r>
@@ -12087,7 +12001,7 @@
             <a:endParaRPr lang="en-US" sz="1200" dirty="0"/>
           </a:p>
           <a:p>
-            <a:pPr indent="0" marL="0">
+            <a:pPr marL="0" indent="0">
               <a:buNone/>
             </a:pPr>
             <a:r>
@@ -12143,7 +12057,7 @@
           <a:bodyPr wrap="square" rtlCol="0" anchor="ctr"/>
           <a:lstStyle/>
           <a:p>
-            <a:pPr indent="0" marL="0">
+            <a:pPr marL="0" indent="0">
               <a:buNone/>
             </a:pPr>
             <a:r>
@@ -12179,7 +12093,7 @@
           <a:bodyPr wrap="square" rtlCol="0" anchor="ctr"/>
           <a:lstStyle/>
           <a:p>
-            <a:pPr indent="0" marL="0">
+            <a:pPr marL="0" indent="0">
               <a:buNone/>
             </a:pPr>
             <a:r>
@@ -12196,7 +12110,7 @@
             <a:endParaRPr lang="en-US" sz="1200" dirty="0"/>
           </a:p>
           <a:p>
-            <a:pPr indent="0" marL="0">
+            <a:pPr marL="0" indent="0">
               <a:buNone/>
             </a:pPr>
             <a:r>
@@ -12235,7 +12149,7 @@
           <a:bodyPr wrap="square" rtlCol="0" anchor="ctr"/>
           <a:lstStyle/>
           <a:p>
-            <a:pPr indent="0" marL="0">
+            <a:pPr marL="0" indent="0">
               <a:buNone/>
             </a:pPr>
             <a:r>
@@ -12271,7 +12185,7 @@
           <a:bodyPr wrap="square" rtlCol="0" anchor="ctr"/>
           <a:lstStyle/>
           <a:p>
-            <a:pPr algn="r" indent="0" marL="0">
+            <a:pPr marL="0" indent="0" algn="r">
               <a:buNone/>
             </a:pPr>
             <a:r>
@@ -12332,7 +12246,7 @@
           <a:bodyPr wrap="square" rtlCol="0" anchor="ctr"/>
           <a:lstStyle/>
           <a:p>
-            <a:pPr indent="0" marL="0">
+            <a:pPr marL="0" indent="0">
               <a:buNone/>
             </a:pPr>
             <a:r>
@@ -12370,9 +12284,27 @@
             <a:tbl>
               <a:tblPr/>
               <a:tblGrid>
-                <a:gridCol w="2743200"/>
-                <a:gridCol w="2743200"/>
-                <a:gridCol w="2743200"/>
+                <a:gridCol w="2743200">
+                  <a:extLst>
+                    <a:ext uri="{9D8B030D-6E8A-4147-A177-3AD203B41FA5}">
+                      <a16:colId xmlns:a16="http://schemas.microsoft.com/office/drawing/2014/main" val="20000"/>
+                    </a:ext>
+                  </a:extLst>
+                </a:gridCol>
+                <a:gridCol w="2743200">
+                  <a:extLst>
+                    <a:ext uri="{9D8B030D-6E8A-4147-A177-3AD203B41FA5}">
+                      <a16:colId xmlns:a16="http://schemas.microsoft.com/office/drawing/2014/main" val="20001"/>
+                    </a:ext>
+                  </a:extLst>
+                </a:gridCol>
+                <a:gridCol w="2743200">
+                  <a:extLst>
+                    <a:ext uri="{9D8B030D-6E8A-4147-A177-3AD203B41FA5}">
+                      <a16:colId xmlns:a16="http://schemas.microsoft.com/office/drawing/2014/main" val="20002"/>
+                    </a:ext>
+                  </a:extLst>
+                </a:gridCol>
               </a:tblGrid>
               <a:tr h="365760">
                 <a:tc>
@@ -12380,7 +12312,7 @@
                     <a:bodyPr/>
                     <a:lstStyle/>
                     <a:p>
-                      <a:pPr algn="l" indent="0" marL="0">
+                      <a:pPr marL="0" indent="0" algn="l">
                         <a:buNone/>
                       </a:pPr>
                       <a:r>
@@ -12394,7 +12326,7 @@
                       <a:endParaRPr lang="en-US" sz="1200" dirty="0"/>
                     </a:p>
                   </a:txBody>
-                  <a:tcPr marL="91440" marR="91440" marT="45720" marB="45720" anchor="ctr">
+                  <a:tcPr anchor="ctr">
                     <a:lnL w="12700" cap="flat" cmpd="sng" algn="ctr">
                       <a:solidFill>
                         <a:srgbClr val="CCCCCC"/>
@@ -12441,7 +12373,7 @@
                     <a:bodyPr/>
                     <a:lstStyle/>
                     <a:p>
-                      <a:pPr algn="l" indent="0" marL="0">
+                      <a:pPr marL="0" indent="0" algn="l">
                         <a:buNone/>
                       </a:pPr>
                       <a:r>
@@ -12455,7 +12387,7 @@
                       <a:endParaRPr lang="en-US" sz="1200" dirty="0"/>
                     </a:p>
                   </a:txBody>
-                  <a:tcPr marL="91440" marR="91440" marT="45720" marB="45720" anchor="ctr">
+                  <a:tcPr anchor="ctr">
                     <a:lnL w="12700" cap="flat" cmpd="sng" algn="ctr">
                       <a:solidFill>
                         <a:srgbClr val="CCCCCC"/>
@@ -12502,7 +12434,7 @@
                     <a:bodyPr/>
                     <a:lstStyle/>
                     <a:p>
-                      <a:pPr algn="l" indent="0" marL="0">
+                      <a:pPr marL="0" indent="0" algn="l">
                         <a:buNone/>
                       </a:pPr>
                       <a:r>
@@ -12516,7 +12448,7 @@
                       <a:endParaRPr lang="en-US" sz="1200" dirty="0"/>
                     </a:p>
                   </a:txBody>
-                  <a:tcPr marL="91440" marR="91440" marT="45720" marB="45720" anchor="ctr">
+                  <a:tcPr anchor="ctr">
                     <a:lnL w="12700" cap="flat" cmpd="sng" algn="ctr">
                       <a:solidFill>
                         <a:srgbClr val="CCCCCC"/>
@@ -12558,6 +12490,11 @@
                     </a:solidFill>
                   </a:tcPr>
                 </a:tc>
+                <a:extLst>
+                  <a:ext uri="{0D108BD9-81ED-4DB2-BD59-A6C34878D82A}">
+                    <a16:rowId xmlns:a16="http://schemas.microsoft.com/office/drawing/2014/main" val="10000"/>
+                  </a:ext>
+                </a:extLst>
               </a:tr>
               <a:tr h="365760">
                 <a:tc>
@@ -12565,7 +12502,7 @@
                     <a:bodyPr/>
                     <a:lstStyle/>
                     <a:p>
-                      <a:pPr algn="l" indent="0" marL="0">
+                      <a:pPr marL="0" indent="0" algn="l">
                         <a:buNone/>
                       </a:pPr>
                       <a:r>
@@ -12579,7 +12516,7 @@
                       <a:endParaRPr lang="en-US" sz="1200" dirty="0"/>
                     </a:p>
                   </a:txBody>
-                  <a:tcPr marL="91440" marR="91440" marT="45720" marB="45720" anchor="ctr">
+                  <a:tcPr anchor="ctr">
                     <a:lnL w="12700" cap="flat" cmpd="sng" algn="ctr">
                       <a:solidFill>
                         <a:srgbClr val="CCCCCC"/>
@@ -12626,7 +12563,7 @@
                     <a:bodyPr/>
                     <a:lstStyle/>
                     <a:p>
-                      <a:pPr algn="l" indent="0" marL="0">
+                      <a:pPr marL="0" indent="0" algn="l">
                         <a:buNone/>
                       </a:pPr>
                       <a:r>
@@ -12640,7 +12577,7 @@
                       <a:endParaRPr lang="en-US" sz="1200" dirty="0"/>
                     </a:p>
                   </a:txBody>
-                  <a:tcPr marL="91440" marR="91440" marT="45720" marB="45720" anchor="ctr">
+                  <a:tcPr anchor="ctr">
                     <a:lnL w="12700" cap="flat" cmpd="sng" algn="ctr">
                       <a:solidFill>
                         <a:srgbClr val="CCCCCC"/>
@@ -12687,7 +12624,7 @@
                     <a:bodyPr/>
                     <a:lstStyle/>
                     <a:p>
-                      <a:pPr algn="l" indent="0" marL="0">
+                      <a:pPr marL="0" indent="0" algn="l">
                         <a:buNone/>
                       </a:pPr>
                       <a:r>
@@ -12701,7 +12638,7 @@
                       <a:endParaRPr lang="en-US" sz="1200" dirty="0"/>
                     </a:p>
                   </a:txBody>
-                  <a:tcPr marL="91440" marR="91440" marT="45720" marB="45720" anchor="ctr">
+                  <a:tcPr anchor="ctr">
                     <a:lnL w="12700" cap="flat" cmpd="sng" algn="ctr">
                       <a:solidFill>
                         <a:srgbClr val="CCCCCC"/>
@@ -12743,6 +12680,11 @@
                     </a:solidFill>
                   </a:tcPr>
                 </a:tc>
+                <a:extLst>
+                  <a:ext uri="{0D108BD9-81ED-4DB2-BD59-A6C34878D82A}">
+                    <a16:rowId xmlns:a16="http://schemas.microsoft.com/office/drawing/2014/main" val="10001"/>
+                  </a:ext>
+                </a:extLst>
               </a:tr>
               <a:tr h="365760">
                 <a:tc>
@@ -12750,7 +12692,7 @@
                     <a:bodyPr/>
                     <a:lstStyle/>
                     <a:p>
-                      <a:pPr algn="l" indent="0" marL="0">
+                      <a:pPr marL="0" indent="0" algn="l">
                         <a:buNone/>
                       </a:pPr>
                       <a:r>
@@ -12764,7 +12706,7 @@
                       <a:endParaRPr lang="en-US" sz="1200" dirty="0"/>
                     </a:p>
                   </a:txBody>
-                  <a:tcPr marL="91440" marR="91440" marT="45720" marB="45720" anchor="ctr">
+                  <a:tcPr anchor="ctr">
                     <a:lnL w="12700" cap="flat" cmpd="sng" algn="ctr">
                       <a:solidFill>
                         <a:srgbClr val="CCCCCC"/>
@@ -12811,7 +12753,7 @@
                     <a:bodyPr/>
                     <a:lstStyle/>
                     <a:p>
-                      <a:pPr algn="l" indent="0" marL="0">
+                      <a:pPr marL="0" indent="0" algn="l">
                         <a:buNone/>
                       </a:pPr>
                       <a:r>
@@ -12825,7 +12767,7 @@
                       <a:endParaRPr lang="en-US" sz="1200" dirty="0"/>
                     </a:p>
                   </a:txBody>
-                  <a:tcPr marL="91440" marR="91440" marT="45720" marB="45720" anchor="ctr">
+                  <a:tcPr anchor="ctr">
                     <a:lnL w="12700" cap="flat" cmpd="sng" algn="ctr">
                       <a:solidFill>
                         <a:srgbClr val="CCCCCC"/>
@@ -12872,7 +12814,7 @@
                     <a:bodyPr/>
                     <a:lstStyle/>
                     <a:p>
-                      <a:pPr algn="l" indent="0" marL="0">
+                      <a:pPr marL="0" indent="0" algn="l">
                         <a:buNone/>
                       </a:pPr>
                       <a:r>
@@ -12886,7 +12828,7 @@
                       <a:endParaRPr lang="en-US" sz="1200" dirty="0"/>
                     </a:p>
                   </a:txBody>
-                  <a:tcPr marL="91440" marR="91440" marT="45720" marB="45720" anchor="ctr">
+                  <a:tcPr anchor="ctr">
                     <a:lnL w="12700" cap="flat" cmpd="sng" algn="ctr">
                       <a:solidFill>
                         <a:srgbClr val="CCCCCC"/>
@@ -12928,6 +12870,11 @@
                     </a:solidFill>
                   </a:tcPr>
                 </a:tc>
+                <a:extLst>
+                  <a:ext uri="{0D108BD9-81ED-4DB2-BD59-A6C34878D82A}">
+                    <a16:rowId xmlns:a16="http://schemas.microsoft.com/office/drawing/2014/main" val="10002"/>
+                  </a:ext>
+                </a:extLst>
               </a:tr>
               <a:tr h="365760">
                 <a:tc>
@@ -12935,7 +12882,7 @@
                     <a:bodyPr/>
                     <a:lstStyle/>
                     <a:p>
-                      <a:pPr algn="l" indent="0" marL="0">
+                      <a:pPr marL="0" indent="0" algn="l">
                         <a:buNone/>
                       </a:pPr>
                       <a:r>
@@ -12949,7 +12896,7 @@
                       <a:endParaRPr lang="en-US" sz="1200" dirty="0"/>
                     </a:p>
                   </a:txBody>
-                  <a:tcPr marL="91440" marR="91440" marT="45720" marB="45720" anchor="ctr">
+                  <a:tcPr anchor="ctr">
                     <a:lnL w="12700" cap="flat" cmpd="sng" algn="ctr">
                       <a:solidFill>
                         <a:srgbClr val="CCCCCC"/>
@@ -12996,7 +12943,7 @@
                     <a:bodyPr/>
                     <a:lstStyle/>
                     <a:p>
-                      <a:pPr algn="l" indent="0" marL="0">
+                      <a:pPr marL="0" indent="0" algn="l">
                         <a:buNone/>
                       </a:pPr>
                       <a:r>
@@ -13010,7 +12957,7 @@
                       <a:endParaRPr lang="en-US" sz="1200" dirty="0"/>
                     </a:p>
                   </a:txBody>
-                  <a:tcPr marL="91440" marR="91440" marT="45720" marB="45720" anchor="ctr">
+                  <a:tcPr anchor="ctr">
                     <a:lnL w="12700" cap="flat" cmpd="sng" algn="ctr">
                       <a:solidFill>
                         <a:srgbClr val="CCCCCC"/>
@@ -13057,7 +13004,7 @@
                     <a:bodyPr/>
                     <a:lstStyle/>
                     <a:p>
-                      <a:pPr algn="l" indent="0" marL="0">
+                      <a:pPr marL="0" indent="0" algn="l">
                         <a:buNone/>
                       </a:pPr>
                       <a:r>
@@ -13071,7 +13018,7 @@
                       <a:endParaRPr lang="en-US" sz="1200" dirty="0"/>
                     </a:p>
                   </a:txBody>
-                  <a:tcPr marL="91440" marR="91440" marT="45720" marB="45720" anchor="ctr">
+                  <a:tcPr anchor="ctr">
                     <a:lnL w="12700" cap="flat" cmpd="sng" algn="ctr">
                       <a:solidFill>
                         <a:srgbClr val="CCCCCC"/>
@@ -13113,6 +13060,11 @@
                     </a:solidFill>
                   </a:tcPr>
                 </a:tc>
+                <a:extLst>
+                  <a:ext uri="{0D108BD9-81ED-4DB2-BD59-A6C34878D82A}">
+                    <a16:rowId xmlns:a16="http://schemas.microsoft.com/office/drawing/2014/main" val="10003"/>
+                  </a:ext>
+                </a:extLst>
               </a:tr>
               <a:tr h="365760">
                 <a:tc>
@@ -13120,7 +13072,7 @@
                     <a:bodyPr/>
                     <a:lstStyle/>
                     <a:p>
-                      <a:pPr algn="l" indent="0" marL="0">
+                      <a:pPr marL="0" indent="0" algn="l">
                         <a:buNone/>
                       </a:pPr>
                       <a:r>
@@ -13134,7 +13086,7 @@
                       <a:endParaRPr lang="en-US" sz="1200" dirty="0"/>
                     </a:p>
                   </a:txBody>
-                  <a:tcPr marL="91440" marR="91440" marT="45720" marB="45720" anchor="ctr">
+                  <a:tcPr anchor="ctr">
                     <a:lnL w="12700" cap="flat" cmpd="sng" algn="ctr">
                       <a:solidFill>
                         <a:srgbClr val="CCCCCC"/>
@@ -13181,7 +13133,7 @@
                     <a:bodyPr/>
                     <a:lstStyle/>
                     <a:p>
-                      <a:pPr algn="l" indent="0" marL="0">
+                      <a:pPr marL="0" indent="0" algn="l">
                         <a:buNone/>
                       </a:pPr>
                       <a:r>
@@ -13195,7 +13147,7 @@
                       <a:endParaRPr lang="en-US" sz="1200" dirty="0"/>
                     </a:p>
                   </a:txBody>
-                  <a:tcPr marL="91440" marR="91440" marT="45720" marB="45720" anchor="ctr">
+                  <a:tcPr anchor="ctr">
                     <a:lnL w="12700" cap="flat" cmpd="sng" algn="ctr">
                       <a:solidFill>
                         <a:srgbClr val="CCCCCC"/>
@@ -13242,7 +13194,7 @@
                     <a:bodyPr/>
                     <a:lstStyle/>
                     <a:p>
-                      <a:pPr algn="l" indent="0" marL="0">
+                      <a:pPr marL="0" indent="0" algn="l">
                         <a:buNone/>
                       </a:pPr>
                       <a:r>
@@ -13256,7 +13208,7 @@
                       <a:endParaRPr lang="en-US" sz="1200" dirty="0"/>
                     </a:p>
                   </a:txBody>
-                  <a:tcPr marL="91440" marR="91440" marT="45720" marB="45720" anchor="ctr">
+                  <a:tcPr anchor="ctr">
                     <a:lnL w="12700" cap="flat" cmpd="sng" algn="ctr">
                       <a:solidFill>
                         <a:srgbClr val="CCCCCC"/>
@@ -13298,6 +13250,11 @@
                     </a:solidFill>
                   </a:tcPr>
                 </a:tc>
+                <a:extLst>
+                  <a:ext uri="{0D108BD9-81ED-4DB2-BD59-A6C34878D82A}">
+                    <a16:rowId xmlns:a16="http://schemas.microsoft.com/office/drawing/2014/main" val="10004"/>
+                  </a:ext>
+                </a:extLst>
               </a:tr>
               <a:tr h="365760">
                 <a:tc>
@@ -13305,7 +13262,7 @@
                     <a:bodyPr/>
                     <a:lstStyle/>
                     <a:p>
-                      <a:pPr algn="l" indent="0" marL="0">
+                      <a:pPr marL="0" indent="0" algn="l">
                         <a:buNone/>
                       </a:pPr>
                       <a:r>
@@ -13319,7 +13276,7 @@
                       <a:endParaRPr lang="en-US" sz="1200" dirty="0"/>
                     </a:p>
                   </a:txBody>
-                  <a:tcPr marL="91440" marR="91440" marT="45720" marB="45720" anchor="ctr">
+                  <a:tcPr anchor="ctr">
                     <a:lnL w="12700" cap="flat" cmpd="sng" algn="ctr">
                       <a:solidFill>
                         <a:srgbClr val="CCCCCC"/>
@@ -13366,7 +13323,7 @@
                     <a:bodyPr/>
                     <a:lstStyle/>
                     <a:p>
-                      <a:pPr algn="l" indent="0" marL="0">
+                      <a:pPr marL="0" indent="0" algn="l">
                         <a:buNone/>
                       </a:pPr>
                       <a:r>
@@ -13380,7 +13337,7 @@
                       <a:endParaRPr lang="en-US" sz="1200" dirty="0"/>
                     </a:p>
                   </a:txBody>
-                  <a:tcPr marL="91440" marR="91440" marT="45720" marB="45720" anchor="ctr">
+                  <a:tcPr anchor="ctr">
                     <a:lnL w="12700" cap="flat" cmpd="sng" algn="ctr">
                       <a:solidFill>
                         <a:srgbClr val="CCCCCC"/>
@@ -13427,7 +13384,7 @@
                     <a:bodyPr/>
                     <a:lstStyle/>
                     <a:p>
-                      <a:pPr algn="l" indent="0" marL="0">
+                      <a:pPr marL="0" indent="0" algn="l">
                         <a:buNone/>
                       </a:pPr>
                       <a:r>
@@ -13441,7 +13398,7 @@
                       <a:endParaRPr lang="en-US" sz="1200" dirty="0"/>
                     </a:p>
                   </a:txBody>
-                  <a:tcPr marL="91440" marR="91440" marT="45720" marB="45720" anchor="ctr">
+                  <a:tcPr anchor="ctr">
                     <a:lnL w="12700" cap="flat" cmpd="sng" algn="ctr">
                       <a:solidFill>
                         <a:srgbClr val="CCCCCC"/>
@@ -13483,6 +13440,11 @@
                     </a:solidFill>
                   </a:tcPr>
                 </a:tc>
+                <a:extLst>
+                  <a:ext uri="{0D108BD9-81ED-4DB2-BD59-A6C34878D82A}">
+                    <a16:rowId xmlns:a16="http://schemas.microsoft.com/office/drawing/2014/main" val="10005"/>
+                  </a:ext>
+                </a:extLst>
               </a:tr>
               <a:tr h="365760">
                 <a:tc>
@@ -13490,7 +13452,7 @@
                     <a:bodyPr/>
                     <a:lstStyle/>
                     <a:p>
-                      <a:pPr algn="l" indent="0" marL="0">
+                      <a:pPr marL="0" indent="0" algn="l">
                         <a:buNone/>
                       </a:pPr>
                       <a:r>
@@ -13504,7 +13466,7 @@
                       <a:endParaRPr lang="en-US" sz="1200" dirty="0"/>
                     </a:p>
                   </a:txBody>
-                  <a:tcPr marL="91440" marR="91440" marT="45720" marB="45720" anchor="ctr">
+                  <a:tcPr anchor="ctr">
                     <a:lnL w="12700" cap="flat" cmpd="sng" algn="ctr">
                       <a:solidFill>
                         <a:srgbClr val="CCCCCC"/>
@@ -13551,7 +13513,7 @@
                     <a:bodyPr/>
                     <a:lstStyle/>
                     <a:p>
-                      <a:pPr algn="l" indent="0" marL="0">
+                      <a:pPr marL="0" indent="0" algn="l">
                         <a:buNone/>
                       </a:pPr>
                       <a:r>
@@ -13565,7 +13527,7 @@
                       <a:endParaRPr lang="en-US" sz="1200" dirty="0"/>
                     </a:p>
                   </a:txBody>
-                  <a:tcPr marL="91440" marR="91440" marT="45720" marB="45720" anchor="ctr">
+                  <a:tcPr anchor="ctr">
                     <a:lnL w="12700" cap="flat" cmpd="sng" algn="ctr">
                       <a:solidFill>
                         <a:srgbClr val="CCCCCC"/>
@@ -13612,7 +13574,7 @@
                     <a:bodyPr/>
                     <a:lstStyle/>
                     <a:p>
-                      <a:pPr algn="l" indent="0" marL="0">
+                      <a:pPr marL="0" indent="0" algn="l">
                         <a:buNone/>
                       </a:pPr>
                       <a:r>
@@ -13626,7 +13588,7 @@
                       <a:endParaRPr lang="en-US" sz="1200" dirty="0"/>
                     </a:p>
                   </a:txBody>
-                  <a:tcPr marL="91440" marR="91440" marT="45720" marB="45720" anchor="ctr">
+                  <a:tcPr anchor="ctr">
                     <a:lnL w="12700" cap="flat" cmpd="sng" algn="ctr">
                       <a:solidFill>
                         <a:srgbClr val="CCCCCC"/>
@@ -13668,6 +13630,11 @@
                     </a:solidFill>
                   </a:tcPr>
                 </a:tc>
+                <a:extLst>
+                  <a:ext uri="{0D108BD9-81ED-4DB2-BD59-A6C34878D82A}">
+                    <a16:rowId xmlns:a16="http://schemas.microsoft.com/office/drawing/2014/main" val="10006"/>
+                  </a:ext>
+                </a:extLst>
               </a:tr>
               <a:tr h="365760">
                 <a:tc>
@@ -13675,7 +13642,7 @@
                     <a:bodyPr/>
                     <a:lstStyle/>
                     <a:p>
-                      <a:pPr algn="l" indent="0" marL="0">
+                      <a:pPr marL="0" indent="0" algn="l">
                         <a:buNone/>
                       </a:pPr>
                       <a:r>
@@ -13689,7 +13656,7 @@
                       <a:endParaRPr lang="en-US" sz="1200" dirty="0"/>
                     </a:p>
                   </a:txBody>
-                  <a:tcPr marL="91440" marR="91440" marT="45720" marB="45720" anchor="ctr">
+                  <a:tcPr anchor="ctr">
                     <a:lnL w="12700" cap="flat" cmpd="sng" algn="ctr">
                       <a:solidFill>
                         <a:srgbClr val="CCCCCC"/>
@@ -13736,7 +13703,7 @@
                     <a:bodyPr/>
                     <a:lstStyle/>
                     <a:p>
-                      <a:pPr algn="l" indent="0" marL="0">
+                      <a:pPr marL="0" indent="0" algn="l">
                         <a:buNone/>
                       </a:pPr>
                       <a:r>
@@ -13750,7 +13717,7 @@
                       <a:endParaRPr lang="en-US" sz="1200" dirty="0"/>
                     </a:p>
                   </a:txBody>
-                  <a:tcPr marL="91440" marR="91440" marT="45720" marB="45720" anchor="ctr">
+                  <a:tcPr anchor="ctr">
                     <a:lnL w="12700" cap="flat" cmpd="sng" algn="ctr">
                       <a:solidFill>
                         <a:srgbClr val="CCCCCC"/>
@@ -13797,7 +13764,7 @@
                     <a:bodyPr/>
                     <a:lstStyle/>
                     <a:p>
-                      <a:pPr algn="l" indent="0" marL="0">
+                      <a:pPr marL="0" indent="0" algn="l">
                         <a:buNone/>
                       </a:pPr>
                       <a:r>
@@ -13811,7 +13778,7 @@
                       <a:endParaRPr lang="en-US" sz="1200" dirty="0"/>
                     </a:p>
                   </a:txBody>
-                  <a:tcPr marL="91440" marR="91440" marT="45720" marB="45720" anchor="ctr">
+                  <a:tcPr anchor="ctr">
                     <a:lnL w="12700" cap="flat" cmpd="sng" algn="ctr">
                       <a:solidFill>
                         <a:srgbClr val="CCCCCC"/>
@@ -13853,6 +13820,11 @@
                     </a:solidFill>
                   </a:tcPr>
                 </a:tc>
+                <a:extLst>
+                  <a:ext uri="{0D108BD9-81ED-4DB2-BD59-A6C34878D82A}">
+                    <a16:rowId xmlns:a16="http://schemas.microsoft.com/office/drawing/2014/main" val="10007"/>
+                  </a:ext>
+                </a:extLst>
               </a:tr>
               <a:tr h="365760">
                 <a:tc>
@@ -13860,7 +13832,7 @@
                     <a:bodyPr/>
                     <a:lstStyle/>
                     <a:p>
-                      <a:pPr algn="l" indent="0" marL="0">
+                      <a:pPr marL="0" indent="0" algn="l">
                         <a:buNone/>
                       </a:pPr>
                       <a:r>
@@ -13874,7 +13846,7 @@
                       <a:endParaRPr lang="en-US" sz="1200" dirty="0"/>
                     </a:p>
                   </a:txBody>
-                  <a:tcPr marL="91440" marR="91440" marT="45720" marB="45720" anchor="ctr">
+                  <a:tcPr anchor="ctr">
                     <a:lnL w="12700" cap="flat" cmpd="sng" algn="ctr">
                       <a:solidFill>
                         <a:srgbClr val="CCCCCC"/>
@@ -13921,7 +13893,7 @@
                     <a:bodyPr/>
                     <a:lstStyle/>
                     <a:p>
-                      <a:pPr algn="l" indent="0" marL="0">
+                      <a:pPr marL="0" indent="0" algn="l">
                         <a:buNone/>
                       </a:pPr>
                       <a:r>
@@ -13935,7 +13907,7 @@
                       <a:endParaRPr lang="en-US" sz="1200" dirty="0"/>
                     </a:p>
                   </a:txBody>
-                  <a:tcPr marL="91440" marR="91440" marT="45720" marB="45720" anchor="ctr">
+                  <a:tcPr anchor="ctr">
                     <a:lnL w="12700" cap="flat" cmpd="sng" algn="ctr">
                       <a:solidFill>
                         <a:srgbClr val="CCCCCC"/>
@@ -13982,7 +13954,7 @@
                     <a:bodyPr/>
                     <a:lstStyle/>
                     <a:p>
-                      <a:pPr algn="l" indent="0" marL="0">
+                      <a:pPr marL="0" indent="0" algn="l">
                         <a:buNone/>
                       </a:pPr>
                       <a:r>
@@ -13996,7 +13968,7 @@
                       <a:endParaRPr lang="en-US" sz="1200" dirty="0"/>
                     </a:p>
                   </a:txBody>
-                  <a:tcPr marL="91440" marR="91440" marT="45720" marB="45720" anchor="ctr">
+                  <a:tcPr anchor="ctr">
                     <a:lnL w="12700" cap="flat" cmpd="sng" algn="ctr">
                       <a:solidFill>
                         <a:srgbClr val="CCCCCC"/>
@@ -14038,6 +14010,11 @@
                     </a:solidFill>
                   </a:tcPr>
                 </a:tc>
+                <a:extLst>
+                  <a:ext uri="{0D108BD9-81ED-4DB2-BD59-A6C34878D82A}">
+                    <a16:rowId xmlns:a16="http://schemas.microsoft.com/office/drawing/2014/main" val="10008"/>
+                  </a:ext>
+                </a:extLst>
               </a:tr>
             </a:tbl>
           </a:graphicData>
@@ -14064,7 +14041,7 @@
           <a:bodyPr wrap="square" rtlCol="0" anchor="ctr"/>
           <a:lstStyle/>
           <a:p>
-            <a:pPr algn="r" indent="0" marL="0">
+            <a:pPr marL="0" indent="0" algn="r">
               <a:buNone/>
             </a:pPr>
             <a:r>
@@ -14380,4 +14357,299 @@
     </a:ext>
   </a:extLst>
 </a:theme>
+</file>
+
+<file path=ppt/theme/theme2.xml><?xml version="1.0" encoding="utf-8"?>
+<a:theme xmlns:a="http://schemas.openxmlformats.org/drawingml/2006/main" name="Office Theme">
+  <a:themeElements>
+    <a:clrScheme name="Office">
+      <a:dk1>
+        <a:sysClr val="windowText" lastClr="000000"/>
+      </a:dk1>
+      <a:lt1>
+        <a:sysClr val="window" lastClr="FFFFFF"/>
+      </a:lt1>
+      <a:dk2>
+        <a:srgbClr val="44546A"/>
+      </a:dk2>
+      <a:lt2>
+        <a:srgbClr val="E7E6E6"/>
+      </a:lt2>
+      <a:accent1>
+        <a:srgbClr val="4472C4"/>
+      </a:accent1>
+      <a:accent2>
+        <a:srgbClr val="ED7D31"/>
+      </a:accent2>
+      <a:accent3>
+        <a:srgbClr val="A5A5A5"/>
+      </a:accent3>
+      <a:accent4>
+        <a:srgbClr val="FFC000"/>
+      </a:accent4>
+      <a:accent5>
+        <a:srgbClr val="5B9BD5"/>
+      </a:accent5>
+      <a:accent6>
+        <a:srgbClr val="70AD47"/>
+      </a:accent6>
+      <a:hlink>
+        <a:srgbClr val="0563C1"/>
+      </a:hlink>
+      <a:folHlink>
+        <a:srgbClr val="954F72"/>
+      </a:folHlink>
+    </a:clrScheme>
+    <a:fontScheme name="Office">
+      <a:majorFont>
+        <a:latin typeface="Calibri Light" panose="020F0302020204030204"/>
+        <a:ea typeface=""/>
+        <a:cs typeface=""/>
+        <a:font script="Jpan" typeface="游ゴシック Light"/>
+        <a:font script="Hang" typeface="맑은 고딕"/>
+        <a:font script="Hans" typeface="等线 Light"/>
+        <a:font script="Hant" typeface="新細明體"/>
+        <a:font script="Arab" typeface="Times New Roman"/>
+        <a:font script="Hebr" typeface="Times New Roman"/>
+        <a:font script="Thai" typeface="Angsana New"/>
+        <a:font script="Ethi" typeface="Nyala"/>
+        <a:font script="Beng" typeface="Vrinda"/>
+        <a:font script="Gujr" typeface="Shruti"/>
+        <a:font script="Khmr" typeface="MoolBoran"/>
+        <a:font script="Knda" typeface="Tunga"/>
+        <a:font script="Guru" typeface="Raavi"/>
+        <a:font script="Cans" typeface="Euphemia"/>
+        <a:font script="Cher" typeface="Plantagenet Cherokee"/>
+        <a:font script="Yiii" typeface="Microsoft Yi Baiti"/>
+        <a:font script="Tibt" typeface="Microsoft Himalaya"/>
+        <a:font script="Thaa" typeface="MV Boli"/>
+        <a:font script="Deva" typeface="Mangal"/>
+        <a:font script="Telu" typeface="Gautami"/>
+        <a:font script="Taml" typeface="Latha"/>
+        <a:font script="Syrc" typeface="Estrangelo Edessa"/>
+        <a:font script="Orya" typeface="Kalinga"/>
+        <a:font script="Mlym" typeface="Kartika"/>
+        <a:font script="Laoo" typeface="DokChampa"/>
+        <a:font script="Sinh" typeface="Iskoola Pota"/>
+        <a:font script="Mong" typeface="Mongolian Baiti"/>
+        <a:font script="Viet" typeface="Times New Roman"/>
+        <a:font script="Uigh" typeface="Microsoft Uighur"/>
+        <a:font script="Geor" typeface="Sylfaen"/>
+        <a:font script="Armn" typeface="Arial"/>
+        <a:font script="Bugi" typeface="Leelawadee UI"/>
+        <a:font script="Bopo" typeface="Microsoft JhengHei"/>
+        <a:font script="Java" typeface="Javanese Text"/>
+        <a:font script="Lisu" typeface="Segoe UI"/>
+        <a:font script="Mymr" typeface="Myanmar Text"/>
+        <a:font script="Nkoo" typeface="Ebrima"/>
+        <a:font script="Olck" typeface="Nirmala UI"/>
+        <a:font script="Osma" typeface="Ebrima"/>
+        <a:font script="Phag" typeface="Phagspa"/>
+        <a:font script="Syrn" typeface="Estrangelo Edessa"/>
+        <a:font script="Syrj" typeface="Estrangelo Edessa"/>
+        <a:font script="Syre" typeface="Estrangelo Edessa"/>
+        <a:font script="Sora" typeface="Nirmala UI"/>
+        <a:font script="Tale" typeface="Microsoft Tai Le"/>
+        <a:font script="Talu" typeface="Microsoft New Tai Lue"/>
+        <a:font script="Tfng" typeface="Ebrima"/>
+      </a:majorFont>
+      <a:minorFont>
+        <a:latin typeface="Calibri" panose="020F0502020204030204"/>
+        <a:ea typeface=""/>
+        <a:cs typeface=""/>
+        <a:font script="Jpan" typeface="游ゴシック"/>
+        <a:font script="Hang" typeface="맑은 고딕"/>
+        <a:font script="Hans" typeface="等线"/>
+        <a:font script="Hant" typeface="新細明體"/>
+        <a:font script="Arab" typeface="Arial"/>
+        <a:font script="Hebr" typeface="Arial"/>
+        <a:font script="Thai" typeface="Cordia New"/>
+        <a:font script="Ethi" typeface="Nyala"/>
+        <a:font script="Beng" typeface="Vrinda"/>
+        <a:font script="Gujr" typeface="Shruti"/>
+        <a:font script="Khmr" typeface="DaunPenh"/>
+        <a:font script="Knda" typeface="Tunga"/>
+        <a:font script="Guru" typeface="Raavi"/>
+        <a:font script="Cans" typeface="Euphemia"/>
+        <a:font script="Cher" typeface="Plantagenet Cherokee"/>
+        <a:font script="Yiii" typeface="Microsoft Yi Baiti"/>
+        <a:font script="Tibt" typeface="Microsoft Himalaya"/>
+        <a:font script="Thaa" typeface="MV Boli"/>
+        <a:font script="Deva" typeface="Mangal"/>
+        <a:font script="Telu" typeface="Gautami"/>
+        <a:font script="Taml" typeface="Latha"/>
+        <a:font script="Syrc" typeface="Estrangelo Edessa"/>
+        <a:font script="Orya" typeface="Kalinga"/>
+        <a:font script="Mlym" typeface="Kartika"/>
+        <a:font script="Laoo" typeface="DokChampa"/>
+        <a:font script="Sinh" typeface="Iskoola Pota"/>
+        <a:font script="Mong" typeface="Mongolian Baiti"/>
+        <a:font script="Viet" typeface="Arial"/>
+        <a:font script="Uigh" typeface="Microsoft Uighur"/>
+        <a:font script="Geor" typeface="Sylfaen"/>
+        <a:font script="Armn" typeface="Arial"/>
+        <a:font script="Bugi" typeface="Leelawadee UI"/>
+        <a:font script="Bopo" typeface="Microsoft JhengHei"/>
+        <a:font script="Java" typeface="Javanese Text"/>
+        <a:font script="Lisu" typeface="Segoe UI"/>
+        <a:font script="Mymr" typeface="Myanmar Text"/>
+        <a:font script="Nkoo" typeface="Ebrima"/>
+        <a:font script="Olck" typeface="Nirmala UI"/>
+        <a:font script="Osma" typeface="Ebrima"/>
+        <a:font script="Phag" typeface="Phagspa"/>
+        <a:font script="Syrn" typeface="Estrangelo Edessa"/>
+        <a:font script="Syrj" typeface="Estrangelo Edessa"/>
+        <a:font script="Syre" typeface="Estrangelo Edessa"/>
+        <a:font script="Sora" typeface="Nirmala UI"/>
+        <a:font script="Tale" typeface="Microsoft Tai Le"/>
+        <a:font script="Talu" typeface="Microsoft New Tai Lue"/>
+        <a:font script="Tfng" typeface="Ebrima"/>
+      </a:minorFont>
+    </a:fontScheme>
+    <a:fmtScheme name="Office">
+      <a:fillStyleLst>
+        <a:solidFill>
+          <a:schemeClr val="phClr"/>
+        </a:solidFill>
+        <a:gradFill rotWithShape="1">
+          <a:gsLst>
+            <a:gs pos="0">
+              <a:schemeClr val="phClr">
+                <a:lumMod val="110000"/>
+                <a:satMod val="105000"/>
+                <a:tint val="67000"/>
+              </a:schemeClr>
+            </a:gs>
+            <a:gs pos="50000">
+              <a:schemeClr val="phClr">
+                <a:lumMod val="105000"/>
+                <a:satMod val="103000"/>
+                <a:tint val="73000"/>
+              </a:schemeClr>
+            </a:gs>
+            <a:gs pos="100000">
+              <a:schemeClr val="phClr">
+                <a:lumMod val="105000"/>
+                <a:satMod val="109000"/>
+                <a:tint val="81000"/>
+              </a:schemeClr>
+            </a:gs>
+          </a:gsLst>
+          <a:lin ang="5400000" scaled="0"/>
+        </a:gradFill>
+        <a:gradFill rotWithShape="1">
+          <a:gsLst>
+            <a:gs pos="0">
+              <a:schemeClr val="phClr">
+                <a:satMod val="103000"/>
+                <a:lumMod val="102000"/>
+                <a:tint val="94000"/>
+              </a:schemeClr>
+            </a:gs>
+            <a:gs pos="50000">
+              <a:schemeClr val="phClr">
+                <a:satMod val="110000"/>
+                <a:lumMod val="100000"/>
+                <a:shade val="100000"/>
+              </a:schemeClr>
+            </a:gs>
+            <a:gs pos="100000">
+              <a:schemeClr val="phClr">
+                <a:lumMod val="99000"/>
+                <a:satMod val="120000"/>
+                <a:shade val="78000"/>
+              </a:schemeClr>
+            </a:gs>
+          </a:gsLst>
+          <a:lin ang="5400000" scaled="0"/>
+        </a:gradFill>
+      </a:fillStyleLst>
+      <a:lnStyleLst>
+        <a:ln w="6350" cap="flat" cmpd="sng" algn="ctr">
+          <a:solidFill>
+            <a:schemeClr val="phClr"/>
+          </a:solidFill>
+          <a:prstDash val="solid"/>
+          <a:miter lim="800000"/>
+        </a:ln>
+        <a:ln w="12700" cap="flat" cmpd="sng" algn="ctr">
+          <a:solidFill>
+            <a:schemeClr val="phClr"/>
+          </a:solidFill>
+          <a:prstDash val="solid"/>
+          <a:miter lim="800000"/>
+        </a:ln>
+        <a:ln w="19050" cap="flat" cmpd="sng" algn="ctr">
+          <a:solidFill>
+            <a:schemeClr val="phClr"/>
+          </a:solidFill>
+          <a:prstDash val="solid"/>
+          <a:miter lim="800000"/>
+        </a:ln>
+      </a:lnStyleLst>
+      <a:effectStyleLst>
+        <a:effectStyle>
+          <a:effectLst/>
+        </a:effectStyle>
+        <a:effectStyle>
+          <a:effectLst/>
+        </a:effectStyle>
+        <a:effectStyle>
+          <a:effectLst>
+            <a:outerShdw blurRad="57150" dist="19050" dir="5400000" algn="ctr" rotWithShape="0">
+              <a:srgbClr val="000000">
+                <a:alpha val="63000"/>
+              </a:srgbClr>
+            </a:outerShdw>
+          </a:effectLst>
+        </a:effectStyle>
+      </a:effectStyleLst>
+      <a:bgFillStyleLst>
+        <a:solidFill>
+          <a:schemeClr val="phClr"/>
+        </a:solidFill>
+        <a:solidFill>
+          <a:schemeClr val="phClr">
+            <a:tint val="95000"/>
+            <a:satMod val="170000"/>
+          </a:schemeClr>
+        </a:solidFill>
+        <a:gradFill rotWithShape="1">
+          <a:gsLst>
+            <a:gs pos="0">
+              <a:schemeClr val="phClr">
+                <a:tint val="93000"/>
+                <a:satMod val="150000"/>
+                <a:shade val="98000"/>
+                <a:lumMod val="102000"/>
+              </a:schemeClr>
+            </a:gs>
+            <a:gs pos="50000">
+              <a:schemeClr val="phClr">
+                <a:tint val="98000"/>
+                <a:satMod val="130000"/>
+                <a:shade val="90000"/>
+                <a:lumMod val="103000"/>
+              </a:schemeClr>
+            </a:gs>
+            <a:gs pos="100000">
+              <a:schemeClr val="phClr">
+                <a:shade val="63000"/>
+                <a:satMod val="120000"/>
+              </a:schemeClr>
+            </a:gs>
+          </a:gsLst>
+          <a:lin ang="5400000" scaled="0"/>
+        </a:gradFill>
+      </a:bgFillStyleLst>
+    </a:fmtScheme>
+  </a:themeElements>
+  <a:objectDefaults/>
+  <a:extraClrSchemeLst/>
+  <a:extLst>
+    <a:ext uri="{05A4C25C-085E-4340-85A3-A5531E510DB2}">
+      <thm15:themeFamily xmlns:thm15="http://schemas.microsoft.com/office/thememl/2012/main" name="Office Theme" id="{62F939B6-93AF-4DB8-9C6B-D6C7DFDC589F}" vid="{4A3C46E8-61CC-4603-A589-7422A47A8E4A}"/>
+    </a:ext>
+  </a:extLst>
+</a:theme>
 </file>